--- a/_wp移行素材/★引継ぎ資料/★山口様向け_ページの直し方.pptx
+++ b/_wp移行素材/★引継ぎ資料/★山口様向け_ページの直し方.pptx
@@ -9860,11 +9860,11 @@
         <p:spPr>
           <a:xfrm>
             <a:off x="7726680" y="5532120"/>
-            <a:ext cx="3931920" cy="685800"/>
+            <a:ext cx="3931920" cy="822960"/>
           </a:xfrm>
           <a:prstGeom prst="roundRect">
             <a:avLst>
-              <a:gd name="adj" fmla="val 13333"/>
+              <a:gd name="adj" fmla="val 11111"/>
             </a:avLst>
           </a:prstGeom>
           <a:solidFill>
@@ -9882,7 +9882,7 @@
         <p:spPr>
           <a:xfrm>
             <a:off x="7955280" y="5715000"/>
-            <a:ext cx="3474720" cy="320040"/>
+            <a:ext cx="3474720" cy="457200"/>
           </a:xfrm>
           <a:prstGeom prst="rect">
             <a:avLst/>
@@ -9909,7 +9909,27 @@
                 <a:ea typeface="Meiryo" pitchFamily="34" charset="-122"/>
                 <a:cs typeface="Meiryo" pitchFamily="34" charset="-120"/>
               </a:rPr>
-              <a:t>いま2件が承認待ちです。</a:t>
+              <a:t>承認待ちは宣伝目的の</a:t>
+            </a:r>
+            <a:endParaRPr lang="en-US" sz="1400" dirty="0"/>
+          </a:p>
+          <a:p>
+            <a:pPr indent="0" marL="0">
+              <a:lnSpc>
+                <a:spcPts val="2100"/>
+              </a:lnSpc>
+              <a:buNone/>
+            </a:pPr>
+            <a:r>
+              <a:rPr lang="en-US" sz="1400" b="1" dirty="0">
+                <a:solidFill>
+                  <a:srgbClr val="B85042"/>
+                </a:solidFill>
+                <a:latin typeface="Meiryo" pitchFamily="34" charset="0"/>
+                <a:ea typeface="Meiryo" pitchFamily="34" charset="-122"/>
+                <a:cs typeface="Meiryo" pitchFamily="34" charset="-120"/>
+              </a:rPr>
+              <a:t>スパムが多いです。</a:t>
             </a:r>
             <a:endParaRPr lang="en-US" sz="1400" dirty="0"/>
           </a:p>

--- a/_wp移行素材/★引継ぎ資料/★山口様向け_ページの直し方.pptx
+++ b/_wp移行素材/★引継ぎ資料/★山口様向け_ページの直し方.pptx
@@ -2014,7 +2014,7 @@
     <p:bg>
       <p:bgPr>
         <a:solidFill>
-          <a:srgbClr val="264653"/>
+          <a:srgbClr val="F4E9D8"/>
         </a:solidFill>
       </p:bgPr>
     </p:bg>
@@ -2034,32 +2034,138 @@
       </p:grpSpPr>
       <p:sp>
         <p:nvSpPr>
-          <p:cNvPr id="2" name="Text 0"/>
-          <p:cNvSpPr/>
-          <p:nvPr/>
-        </p:nvSpPr>
-        <p:spPr>
-          <a:xfrm>
-            <a:off x="914400" y="2011680"/>
-            <a:ext cx="10332720" cy="914400"/>
-          </a:xfrm>
-          <a:prstGeom prst="rect">
-            <a:avLst/>
-          </a:prstGeom>
-          <a:noFill/>
-          <a:ln/>
-        </p:spPr>
-        <p:txBody>
-          <a:bodyPr wrap="square" lIns="0" tIns="0" rIns="0" bIns="0" rtlCol="0" anchor="ctr"/>
-          <a:lstStyle/>
-          <a:p>
-            <a:pPr indent="0" marL="0">
-              <a:buNone/>
-            </a:pPr>
-            <a:r>
-              <a:rPr lang="en-US" sz="4600" b="1" dirty="0">
-                <a:solidFill>
-                  <a:srgbClr val="FFFFFF"/>
+          <p:cNvPr id="2" name="Shape 0"/>
+          <p:cNvSpPr/>
+          <p:nvPr/>
+        </p:nvSpPr>
+        <p:spPr>
+          <a:xfrm>
+            <a:off x="0" y="0"/>
+            <a:ext cx="12198096" cy="146304"/>
+          </a:xfrm>
+          <a:prstGeom prst="rect">
+            <a:avLst/>
+          </a:prstGeom>
+          <a:solidFill>
+            <a:srgbClr val="264653"/>
+          </a:solidFill>
+          <a:ln/>
+        </p:spPr>
+      </p:sp>
+      <p:sp>
+        <p:nvSpPr>
+          <p:cNvPr id="3" name="Shape 1"/>
+          <p:cNvSpPr/>
+          <p:nvPr/>
+        </p:nvSpPr>
+        <p:spPr>
+          <a:xfrm>
+            <a:off x="0" y="6711696"/>
+            <a:ext cx="12198096" cy="146304"/>
+          </a:xfrm>
+          <a:prstGeom prst="rect">
+            <a:avLst/>
+          </a:prstGeom>
+          <a:solidFill>
+            <a:srgbClr val="F4A261"/>
+          </a:solidFill>
+          <a:ln/>
+        </p:spPr>
+      </p:sp>
+      <p:pic>
+        <p:nvPicPr>
+          <p:cNvPr id="4" name="Image 0" descr="/sessions/compassionate-sweet-heisenberg/mnt/dev-aspath-life-main/tools/assets/logo-deck.png">    </p:cNvPr>
+          <p:cNvPicPr>
+            <a:picLocks noChangeAspect="1"/>
+          </p:cNvPicPr>
+          <p:nvPr/>
+        </p:nvPicPr>
+        <p:blipFill>
+          <a:blip r:embed="rId1"/>
+          <a:stretch>
+            <a:fillRect/>
+          </a:stretch>
+        </p:blipFill>
+        <p:spPr>
+          <a:xfrm>
+            <a:off x="1051560" y="1874520"/>
+            <a:ext cx="2320246" cy="2834640"/>
+          </a:xfrm>
+          <a:prstGeom prst="rect">
+            <a:avLst/>
+          </a:prstGeom>
+        </p:spPr>
+      </p:pic>
+      <p:sp>
+        <p:nvSpPr>
+          <p:cNvPr id="5" name="Text 2"/>
+          <p:cNvSpPr txBox="1"/>
+          <p:nvPr/>
+        </p:nvSpPr>
+        <p:spPr>
+          <a:xfrm>
+            <a:off x="4892040" y="1572768"/>
+            <a:ext cx="6675120" cy="384048"/>
+          </a:xfrm>
+          <a:prstGeom prst="rect">
+            <a:avLst/>
+          </a:prstGeom>
+          <a:noFill/>
+          <a:ln/>
+        </p:spPr>
+        <p:txBody>
+          <a:bodyPr wrap="square" lIns="0" tIns="0" rIns="0" bIns="0" rtlCol="0" anchor="ctr"/>
+          <a:lstStyle/>
+          <a:p>
+            <a:pPr indent="0" marL="0">
+              <a:buNone/>
+            </a:pPr>
+            <a:r>
+              <a:rPr lang="en-US" sz="1500" b="1" spc="600" kern="0" dirty="0">
+                <a:solidFill>
+                  <a:srgbClr val="F4A261"/>
+                </a:solidFill>
+                <a:latin typeface="Meiryo" pitchFamily="34" charset="0"/>
+                <a:ea typeface="Meiryo" pitchFamily="34" charset="-122"/>
+                <a:cs typeface="Meiryo" pitchFamily="34" charset="-120"/>
+              </a:rPr>
+              <a:t>ASPATH</a:t>
+            </a:r>
+            <a:endParaRPr lang="en-US" sz="1500" dirty="0"/>
+          </a:p>
+        </p:txBody>
+      </p:sp>
+      <p:sp>
+        <p:nvSpPr>
+          <p:cNvPr id="6" name="Text 3"/>
+          <p:cNvSpPr txBox="1"/>
+          <p:nvPr/>
+        </p:nvSpPr>
+        <p:spPr>
+          <a:xfrm>
+            <a:off x="4892040" y="1993392"/>
+            <a:ext cx="6675120" cy="914400"/>
+          </a:xfrm>
+          <a:prstGeom prst="rect">
+            <a:avLst/>
+          </a:prstGeom>
+          <a:noFill/>
+          <a:ln/>
+        </p:spPr>
+        <p:txBody>
+          <a:bodyPr wrap="square" lIns="0" tIns="0" rIns="0" bIns="0" rtlCol="0" anchor="ctr"/>
+          <a:lstStyle/>
+          <a:p>
+            <a:pPr indent="0" marL="0">
+              <a:lnSpc>
+                <a:spcPct val="120000"/>
+              </a:lnSpc>
+              <a:buNone/>
+            </a:pPr>
+            <a:r>
+              <a:rPr lang="en-US" sz="3600" b="1" dirty="0">
+                <a:solidFill>
+                  <a:srgbClr val="264653"/>
                 </a:solidFill>
                 <a:latin typeface="Meiryo" pitchFamily="34" charset="0"/>
                 <a:ea typeface="Meiryo" pitchFamily="34" charset="-122"/>
@@ -2067,130 +2173,206 @@
               </a:rPr>
               <a:t>ホームページの直し方</a:t>
             </a:r>
-            <a:endParaRPr lang="en-US" sz="4600" dirty="0"/>
-          </a:p>
-        </p:txBody>
-      </p:sp>
-      <p:sp>
-        <p:nvSpPr>
-          <p:cNvPr id="3" name="Text 1"/>
-          <p:cNvSpPr/>
-          <p:nvPr/>
-        </p:nvSpPr>
-        <p:spPr>
-          <a:xfrm>
-            <a:off x="960120" y="3108960"/>
-            <a:ext cx="10058400" cy="457200"/>
-          </a:xfrm>
-          <a:prstGeom prst="rect">
-            <a:avLst/>
-          </a:prstGeom>
-          <a:noFill/>
-          <a:ln/>
-        </p:spPr>
-        <p:txBody>
-          <a:bodyPr wrap="square" lIns="0" tIns="0" rIns="0" bIns="0" rtlCol="0" anchor="ctr"/>
-          <a:lstStyle/>
-          <a:p>
-            <a:pPr indent="0" marL="0">
-              <a:buNone/>
-            </a:pPr>
-            <a:r>
-              <a:rPr lang="en-US" sz="2000" dirty="0">
-                <a:solidFill>
-                  <a:srgbClr val="F4A261"/>
-                </a:solidFill>
-                <a:latin typeface="Meiryo" pitchFamily="34" charset="0"/>
-                <a:ea typeface="Meiryo" pitchFamily="34" charset="-122"/>
-                <a:cs typeface="Meiryo" pitchFamily="34" charset="-120"/>
-              </a:rPr>
-              <a:t>山口様へ　／　2026年8月23日</a:t>
-            </a:r>
-            <a:endParaRPr lang="en-US" sz="2000" dirty="0"/>
-          </a:p>
-        </p:txBody>
-      </p:sp>
-      <p:sp>
-        <p:nvSpPr>
-          <p:cNvPr id="4" name="Shape 2"/>
-          <p:cNvSpPr/>
-          <p:nvPr/>
-        </p:nvSpPr>
-        <p:spPr>
-          <a:xfrm>
-            <a:off x="914400" y="3931920"/>
-            <a:ext cx="6766560" cy="1554480"/>
-          </a:xfrm>
-          <a:prstGeom prst="roundRect">
-            <a:avLst>
-              <a:gd name="adj" fmla="val 7059"/>
-            </a:avLst>
+            <a:endParaRPr lang="en-US" sz="3600" dirty="0"/>
+          </a:p>
+        </p:txBody>
+      </p:sp>
+      <p:sp>
+        <p:nvSpPr>
+          <p:cNvPr id="7" name="Text 4"/>
+          <p:cNvSpPr txBox="1"/>
+          <p:nvPr/>
+        </p:nvSpPr>
+        <p:spPr>
+          <a:xfrm>
+            <a:off x="4892040" y="2962656"/>
+            <a:ext cx="6675120" cy="548640"/>
+          </a:xfrm>
+          <a:prstGeom prst="rect">
+            <a:avLst/>
+          </a:prstGeom>
+          <a:noFill/>
+          <a:ln/>
+        </p:spPr>
+        <p:txBody>
+          <a:bodyPr wrap="square" lIns="0" tIns="0" rIns="0" bIns="0" rtlCol="0" anchor="ctr"/>
+          <a:lstStyle/>
+          <a:p>
+            <a:pPr indent="0" marL="0">
+              <a:lnSpc>
+                <a:spcPct val="130000"/>
+              </a:lnSpc>
+              <a:buNone/>
+            </a:pPr>
+            <a:r>
+              <a:rPr lang="en-US" sz="1500" dirty="0">
+                <a:solidFill>
+                  <a:srgbClr val="52707A"/>
+                </a:solidFill>
+                <a:latin typeface="Meiryo" pitchFamily="34" charset="0"/>
+                <a:ea typeface="Meiryo" pitchFamily="34" charset="-122"/>
+                <a:cs typeface="Meiryo" pitchFamily="34" charset="-120"/>
+              </a:rPr>
+              <a:t>山口様へ</a:t>
+            </a:r>
+            <a:endParaRPr lang="en-US" sz="1500" dirty="0"/>
+          </a:p>
+          <a:p>
+            <a:pPr indent="0" marL="0">
+              <a:lnSpc>
+                <a:spcPct val="130000"/>
+              </a:lnSpc>
+              <a:buNone/>
+            </a:pPr>
+            <a:r>
+              <a:rPr lang="en-US" sz="1500" dirty="0">
+                <a:solidFill>
+                  <a:srgbClr val="52707A"/>
+                </a:solidFill>
+                <a:latin typeface="Meiryo" pitchFamily="34" charset="0"/>
+                <a:ea typeface="Meiryo" pitchFamily="34" charset="-122"/>
+                <a:cs typeface="Meiryo" pitchFamily="34" charset="-120"/>
+              </a:rPr>
+              <a:t>操作を間違えても、元に戻せないことはほとんどありません。迷ったら、そのままご連絡ください。</a:t>
+            </a:r>
+            <a:endParaRPr lang="en-US" sz="1500" dirty="0"/>
+          </a:p>
+        </p:txBody>
+      </p:sp>
+      <p:sp>
+        <p:nvSpPr>
+          <p:cNvPr id="8" name="Shape 5"/>
+          <p:cNvSpPr/>
+          <p:nvPr/>
+        </p:nvSpPr>
+        <p:spPr>
+          <a:xfrm>
+            <a:off x="4892040" y="4736592"/>
+            <a:ext cx="1828800" cy="18288"/>
+          </a:xfrm>
+          <a:prstGeom prst="rect">
+            <a:avLst/>
           </a:prstGeom>
           <a:solidFill>
-            <a:srgbClr val="32596B"/>
+            <a:srgbClr val="F4A261"/>
           </a:solidFill>
           <a:ln/>
         </p:spPr>
       </p:sp>
       <p:sp>
         <p:nvSpPr>
-          <p:cNvPr id="5" name="Text 3"/>
-          <p:cNvSpPr/>
-          <p:nvPr/>
-        </p:nvSpPr>
-        <p:spPr>
-          <a:xfrm>
-            <a:off x="1188720" y="4297680"/>
-            <a:ext cx="6309360" cy="914400"/>
-          </a:xfrm>
-          <a:prstGeom prst="rect">
-            <a:avLst/>
-          </a:prstGeom>
-          <a:noFill/>
-          <a:ln/>
-        </p:spPr>
-        <p:txBody>
-          <a:bodyPr wrap="square" lIns="0" tIns="0" rIns="0" bIns="0" rtlCol="0" anchor="ctr"/>
-          <a:lstStyle/>
-          <a:p>
-            <a:pPr indent="0" marL="0">
-              <a:lnSpc>
-                <a:spcPts val="2600"/>
-              </a:lnSpc>
-              <a:buNone/>
-            </a:pPr>
-            <a:r>
-              <a:rPr lang="en-US" sz="1600" dirty="0">
-                <a:solidFill>
-                  <a:srgbClr val="DCE7EA"/>
-                </a:solidFill>
-                <a:latin typeface="Meiryo" pitchFamily="34" charset="0"/>
-                <a:ea typeface="Meiryo" pitchFamily="34" charset="-122"/>
-                <a:cs typeface="Meiryo" pitchFamily="34" charset="-120"/>
-              </a:rPr>
-              <a:t>操作を間違えても、元に戻せないことはほとんどありません。</a:t>
-            </a:r>
-            <a:endParaRPr lang="en-US" sz="1600" dirty="0"/>
-          </a:p>
-          <a:p>
-            <a:pPr indent="0" marL="0">
-              <a:lnSpc>
-                <a:spcPts val="2600"/>
-              </a:lnSpc>
-              <a:buNone/>
-            </a:pPr>
-            <a:r>
-              <a:rPr lang="en-US" sz="1600" dirty="0">
-                <a:solidFill>
-                  <a:srgbClr val="DCE7EA"/>
-                </a:solidFill>
-                <a:latin typeface="Meiryo" pitchFamily="34" charset="0"/>
-                <a:ea typeface="Meiryo" pitchFamily="34" charset="-122"/>
-                <a:cs typeface="Meiryo" pitchFamily="34" charset="-120"/>
-              </a:rPr>
-              <a:t>迷ったら、そのままご連絡ください。</a:t>
-            </a:r>
-            <a:endParaRPr lang="en-US" sz="1600" dirty="0"/>
+          <p:cNvPr id="9" name="Text 6"/>
+          <p:cNvSpPr txBox="1"/>
+          <p:nvPr/>
+        </p:nvSpPr>
+        <p:spPr>
+          <a:xfrm>
+            <a:off x="4892040" y="4864608"/>
+            <a:ext cx="6675120" cy="292608"/>
+          </a:xfrm>
+          <a:prstGeom prst="rect">
+            <a:avLst/>
+          </a:prstGeom>
+          <a:noFill/>
+          <a:ln/>
+        </p:spPr>
+        <p:txBody>
+          <a:bodyPr wrap="square" lIns="0" tIns="0" rIns="0" bIns="0" rtlCol="0" anchor="ctr"/>
+          <a:lstStyle/>
+          <a:p>
+            <a:pPr indent="0" marL="0">
+              <a:buNone/>
+            </a:pPr>
+            <a:r>
+              <a:rPr lang="en-US" sz="1250" b="1" dirty="0">
+                <a:solidFill>
+                  <a:srgbClr val="264653"/>
+                </a:solidFill>
+                <a:latin typeface="Meiryo" pitchFamily="34" charset="0"/>
+                <a:ea typeface="Meiryo" pitchFamily="34" charset="-122"/>
+                <a:cs typeface="Meiryo" pitchFamily="34" charset="-120"/>
+              </a:rPr>
+              <a:t>鹿児島のパーキンソン病専門トレーニングスタジオ</a:t>
+            </a:r>
+            <a:endParaRPr lang="en-US" sz="1250" dirty="0"/>
+          </a:p>
+        </p:txBody>
+      </p:sp>
+      <p:sp>
+        <p:nvSpPr>
+          <p:cNvPr id="10" name="Text 7"/>
+          <p:cNvSpPr txBox="1"/>
+          <p:nvPr/>
+        </p:nvSpPr>
+        <p:spPr>
+          <a:xfrm>
+            <a:off x="4892040" y="5193792"/>
+            <a:ext cx="6675120" cy="274320"/>
+          </a:xfrm>
+          <a:prstGeom prst="rect">
+            <a:avLst/>
+          </a:prstGeom>
+          <a:noFill/>
+          <a:ln/>
+        </p:spPr>
+        <p:txBody>
+          <a:bodyPr wrap="square" lIns="0" tIns="0" rIns="0" bIns="0" rtlCol="0" anchor="ctr"/>
+          <a:lstStyle/>
+          <a:p>
+            <a:pPr indent="0" marL="0">
+              <a:buNone/>
+            </a:pPr>
+            <a:r>
+              <a:rPr lang="en-US" sz="1150" dirty="0">
+                <a:solidFill>
+                  <a:srgbClr val="52707A"/>
+                </a:solidFill>
+                <a:latin typeface="Meiryo" pitchFamily="34" charset="0"/>
+                <a:ea typeface="Meiryo" pitchFamily="34" charset="-122"/>
+                <a:cs typeface="Meiryo" pitchFamily="34" charset="-120"/>
+              </a:rPr>
+              <a:t>動くことを楽しむ。明日につながる。</a:t>
+            </a:r>
+            <a:endParaRPr lang="en-US" sz="1150" dirty="0"/>
+          </a:p>
+        </p:txBody>
+      </p:sp>
+      <p:sp>
+        <p:nvSpPr>
+          <p:cNvPr id="11" name="Text 8"/>
+          <p:cNvSpPr txBox="1"/>
+          <p:nvPr/>
+        </p:nvSpPr>
+        <p:spPr>
+          <a:xfrm>
+            <a:off x="4892040" y="5596128"/>
+            <a:ext cx="6675120" cy="274320"/>
+          </a:xfrm>
+          <a:prstGeom prst="rect">
+            <a:avLst/>
+          </a:prstGeom>
+          <a:noFill/>
+          <a:ln/>
+        </p:spPr>
+        <p:txBody>
+          <a:bodyPr wrap="square" lIns="0" tIns="0" rIns="0" bIns="0" rtlCol="0" anchor="ctr"/>
+          <a:lstStyle/>
+          <a:p>
+            <a:pPr indent="0" marL="0">
+              <a:buNone/>
+            </a:pPr>
+            <a:r>
+              <a:rPr lang="en-US" sz="1050" dirty="0">
+                <a:solidFill>
+                  <a:srgbClr val="8A9CA2"/>
+                </a:solidFill>
+                <a:latin typeface="Meiryo" pitchFamily="34" charset="0"/>
+                <a:ea typeface="Meiryo" pitchFamily="34" charset="-122"/>
+                <a:cs typeface="Meiryo" pitchFamily="34" charset="-120"/>
+              </a:rPr>
+              <a:t>aspath-life.com　／　2026年8月23日　ASPATH 様　ご納品資料</a:t>
+            </a:r>
+            <a:endParaRPr lang="en-US" sz="1050" dirty="0"/>
           </a:p>
         </p:txBody>
       </p:sp>
@@ -2226,9 +2408,72 @@
           <a:chExt cx="0" cy="0"/>
         </a:xfrm>
       </p:grpSpPr>
-      <p:sp>
-        <p:nvSpPr>
-          <p:cNvPr id="2" name="Text 0"/>
+      <p:pic>
+        <p:nvPicPr>
+          <p:cNvPr id="2" name="Image 0" descr="/sessions/compassionate-sweet-heisenberg/mnt/dev-aspath-life-main/tools/assets/logo-deck.png">    </p:cNvPr>
+          <p:cNvPicPr>
+            <a:picLocks noChangeAspect="1"/>
+          </p:cNvPicPr>
+          <p:nvPr/>
+        </p:nvPicPr>
+        <p:blipFill>
+          <a:blip r:embed="rId1"/>
+          <a:stretch>
+            <a:fillRect/>
+          </a:stretch>
+        </p:blipFill>
+        <p:spPr>
+          <a:xfrm>
+            <a:off x="11458173" y="109728"/>
+            <a:ext cx="209571" cy="256032"/>
+          </a:xfrm>
+          <a:prstGeom prst="rect">
+            <a:avLst/>
+          </a:prstGeom>
+        </p:spPr>
+      </p:pic>
+      <p:sp>
+        <p:nvSpPr>
+          <p:cNvPr id="3" name="Text 0"/>
+          <p:cNvSpPr txBox="1"/>
+          <p:nvPr/>
+        </p:nvSpPr>
+        <p:spPr>
+          <a:xfrm>
+            <a:off x="8623533" y="128016"/>
+            <a:ext cx="2743200" cy="237744"/>
+          </a:xfrm>
+          <a:prstGeom prst="rect">
+            <a:avLst/>
+          </a:prstGeom>
+          <a:noFill/>
+          <a:ln/>
+        </p:spPr>
+        <p:txBody>
+          <a:bodyPr wrap="square" lIns="0" tIns="0" rIns="0" bIns="0" rtlCol="0" anchor="ctr"/>
+          <a:lstStyle/>
+          <a:p>
+            <a:pPr algn="r" indent="0" marL="0">
+              <a:buNone/>
+            </a:pPr>
+            <a:r>
+              <a:rPr lang="en-US" sz="750" dirty="0">
+                <a:solidFill>
+                  <a:srgbClr val="97A9AF"/>
+                </a:solidFill>
+                <a:latin typeface="Meiryo" pitchFamily="34" charset="0"/>
+                <a:ea typeface="Meiryo" pitchFamily="34" charset="-122"/>
+                <a:cs typeface="Meiryo" pitchFamily="34" charset="-120"/>
+              </a:rPr>
+              <a:t>鹿児島のパーキンソン病専門トレーニングスタジオ</a:t>
+            </a:r>
+            <a:endParaRPr lang="en-US" sz="750" dirty="0"/>
+          </a:p>
+        </p:txBody>
+      </p:sp>
+      <p:sp>
+        <p:nvSpPr>
+          <p:cNvPr id="4" name="Text 1"/>
           <p:cNvSpPr/>
           <p:nvPr/>
         </p:nvSpPr>
@@ -2267,7 +2512,7 @@
       </p:sp>
       <p:sp>
         <p:nvSpPr>
-          <p:cNvPr id="3" name="Text 1"/>
+          <p:cNvPr id="5" name="Text 2"/>
           <p:cNvSpPr/>
           <p:nvPr/>
         </p:nvSpPr>
@@ -2306,7 +2551,7 @@
       </p:sp>
       <p:sp>
         <p:nvSpPr>
-          <p:cNvPr id="4" name="Text 2"/>
+          <p:cNvPr id="6" name="Text 3"/>
           <p:cNvSpPr/>
           <p:nvPr/>
         </p:nvSpPr>
@@ -2345,7 +2590,7 @@
       </p:sp>
       <p:sp>
         <p:nvSpPr>
-          <p:cNvPr id="5" name="Shape 3"/>
+          <p:cNvPr id="7" name="Shape 4"/>
           <p:cNvSpPr/>
           <p:nvPr/>
         </p:nvSpPr>
@@ -2367,7 +2612,7 @@
       </p:sp>
       <p:sp>
         <p:nvSpPr>
-          <p:cNvPr id="6" name="Text 4"/>
+          <p:cNvPr id="8" name="Text 5"/>
           <p:cNvSpPr/>
           <p:nvPr/>
         </p:nvSpPr>
@@ -2406,7 +2651,7 @@
       </p:sp>
       <p:sp>
         <p:nvSpPr>
-          <p:cNvPr id="7" name="Text 5"/>
+          <p:cNvPr id="9" name="Text 6"/>
           <p:cNvSpPr/>
           <p:nvPr/>
         </p:nvSpPr>
@@ -2468,7 +2713,7 @@
       </p:sp>
       <p:sp>
         <p:nvSpPr>
-          <p:cNvPr id="8" name="Shape 6"/>
+          <p:cNvPr id="10" name="Shape 7"/>
           <p:cNvSpPr/>
           <p:nvPr/>
         </p:nvSpPr>
@@ -2490,7 +2735,7 @@
       </p:sp>
       <p:sp>
         <p:nvSpPr>
-          <p:cNvPr id="9" name="Text 7"/>
+          <p:cNvPr id="11" name="Text 8"/>
           <p:cNvSpPr/>
           <p:nvPr/>
         </p:nvSpPr>
@@ -2529,7 +2774,7 @@
       </p:sp>
       <p:sp>
         <p:nvSpPr>
-          <p:cNvPr id="10" name="Text 8"/>
+          <p:cNvPr id="12" name="Text 9"/>
           <p:cNvSpPr/>
           <p:nvPr/>
         </p:nvSpPr>
@@ -2568,7 +2813,7 @@
       </p:sp>
       <p:sp>
         <p:nvSpPr>
-          <p:cNvPr id="11" name="Shape 9"/>
+          <p:cNvPr id="13" name="Shape 10"/>
           <p:cNvSpPr/>
           <p:nvPr/>
         </p:nvSpPr>
@@ -2590,7 +2835,7 @@
       </p:sp>
       <p:sp>
         <p:nvSpPr>
-          <p:cNvPr id="12" name="Text 10"/>
+          <p:cNvPr id="14" name="Text 11"/>
           <p:cNvSpPr/>
           <p:nvPr/>
         </p:nvSpPr>
@@ -2662,126 +2907,9 @@
           <a:chExt cx="0" cy="0"/>
         </a:xfrm>
       </p:grpSpPr>
-      <p:sp>
-        <p:nvSpPr>
-          <p:cNvPr id="2" name="Text 0"/>
-          <p:cNvSpPr/>
-          <p:nvPr/>
-        </p:nvSpPr>
-        <p:spPr>
-          <a:xfrm>
-            <a:off x="548640" y="292608"/>
-            <a:ext cx="11064240" cy="731520"/>
-          </a:xfrm>
-          <a:prstGeom prst="rect">
-            <a:avLst/>
-          </a:prstGeom>
-          <a:noFill/>
-          <a:ln/>
-        </p:spPr>
-        <p:txBody>
-          <a:bodyPr wrap="square" lIns="0" tIns="0" rIns="0" bIns="0" rtlCol="0" anchor="ctr"/>
-          <a:lstStyle/>
-          <a:p>
-            <a:pPr indent="0" marL="0">
-              <a:buNone/>
-            </a:pPr>
-            <a:r>
-              <a:rPr lang="en-US" sz="3400" b="1" dirty="0">
-                <a:solidFill>
-                  <a:srgbClr val="264653"/>
-                </a:solidFill>
-                <a:latin typeface="Meiryo" pitchFamily="34" charset="0"/>
-                <a:ea typeface="Meiryo" pitchFamily="34" charset="-122"/>
-                <a:cs typeface="Meiryo" pitchFamily="34" charset="-120"/>
-              </a:rPr>
-              <a:t>番号でお知らせください</a:t>
-            </a:r>
-            <a:endParaRPr lang="en-US" sz="3400" dirty="0"/>
-          </a:p>
-        </p:txBody>
-      </p:sp>
-      <p:sp>
-        <p:nvSpPr>
-          <p:cNvPr id="3" name="Text 1"/>
-          <p:cNvSpPr/>
-          <p:nvPr/>
-        </p:nvSpPr>
-        <p:spPr>
-          <a:xfrm>
-            <a:off x="566928" y="1042416"/>
-            <a:ext cx="11064240" cy="365760"/>
-          </a:xfrm>
-          <a:prstGeom prst="rect">
-            <a:avLst/>
-          </a:prstGeom>
-          <a:noFill/>
-          <a:ln/>
-        </p:spPr>
-        <p:txBody>
-          <a:bodyPr wrap="square" lIns="0" tIns="0" rIns="0" bIns="0" rtlCol="0" anchor="ctr"/>
-          <a:lstStyle/>
-          <a:p>
-            <a:pPr indent="0" marL="0">
-              <a:buNone/>
-            </a:pPr>
-            <a:r>
-              <a:rPr lang="en-US" sz="1600" dirty="0">
-                <a:solidFill>
-                  <a:srgbClr val="5E7681"/>
-                </a:solidFill>
-                <a:latin typeface="Meiryo" pitchFamily="34" charset="0"/>
-                <a:ea typeface="Meiryo" pitchFamily="34" charset="-122"/>
-                <a:cs typeface="Meiryo" pitchFamily="34" charset="-120"/>
-              </a:rPr>
-              <a:t>この資料の中で、見出しに番号を付けています</a:t>
-            </a:r>
-            <a:endParaRPr lang="en-US" sz="1600" dirty="0"/>
-          </a:p>
-        </p:txBody>
-      </p:sp>
-      <p:sp>
-        <p:nvSpPr>
-          <p:cNvPr id="4" name="Text 2"/>
-          <p:cNvSpPr/>
-          <p:nvPr/>
-        </p:nvSpPr>
-        <p:spPr>
-          <a:xfrm>
-            <a:off x="11338560" y="6309360"/>
-            <a:ext cx="457200" cy="274320"/>
-          </a:xfrm>
-          <a:prstGeom prst="rect">
-            <a:avLst/>
-          </a:prstGeom>
-          <a:noFill/>
-          <a:ln/>
-        </p:spPr>
-        <p:txBody>
-          <a:bodyPr wrap="square" lIns="0" tIns="0" rIns="0" bIns="0" rtlCol="0" anchor="ctr"/>
-          <a:lstStyle/>
-          <a:p>
-            <a:pPr algn="r" indent="0" marL="0">
-              <a:buNone/>
-            </a:pPr>
-            <a:r>
-              <a:rPr lang="en-US" sz="1100" dirty="0">
-                <a:solidFill>
-                  <a:srgbClr val="A8B4B8"/>
-                </a:solidFill>
-                <a:latin typeface="Meiryo" pitchFamily="34" charset="0"/>
-                <a:ea typeface="Meiryo" pitchFamily="34" charset="-122"/>
-                <a:cs typeface="Meiryo" pitchFamily="34" charset="-120"/>
-              </a:rPr>
-              <a:t>10</a:t>
-            </a:r>
-            <a:endParaRPr lang="en-US" sz="1100" dirty="0"/>
-          </a:p>
-        </p:txBody>
-      </p:sp>
       <p:pic>
         <p:nvPicPr>
-          <p:cNvPr id="5" name="Image 0" descr="/sessions/compassionate-sweet-heisenberg/mnt/dev-aspath-life-main/_wp移行素材/★引継ぎ資料/画像/Y07_ページの番号.jpg">    </p:cNvPr>
+          <p:cNvPr id="2" name="Image 0" descr="/sessions/compassionate-sweet-heisenberg/mnt/dev-aspath-life-main/tools/assets/logo-deck.png">    </p:cNvPr>
           <p:cNvPicPr>
             <a:picLocks noChangeAspect="1"/>
           </p:cNvPicPr>
@@ -2795,6 +2923,186 @@
         </p:blipFill>
         <p:spPr>
           <a:xfrm>
+            <a:off x="11458173" y="109728"/>
+            <a:ext cx="209571" cy="256032"/>
+          </a:xfrm>
+          <a:prstGeom prst="rect">
+            <a:avLst/>
+          </a:prstGeom>
+        </p:spPr>
+      </p:pic>
+      <p:sp>
+        <p:nvSpPr>
+          <p:cNvPr id="3" name="Text 0"/>
+          <p:cNvSpPr txBox="1"/>
+          <p:nvPr/>
+        </p:nvSpPr>
+        <p:spPr>
+          <a:xfrm>
+            <a:off x="8623533" y="128016"/>
+            <a:ext cx="2743200" cy="237744"/>
+          </a:xfrm>
+          <a:prstGeom prst="rect">
+            <a:avLst/>
+          </a:prstGeom>
+          <a:noFill/>
+          <a:ln/>
+        </p:spPr>
+        <p:txBody>
+          <a:bodyPr wrap="square" lIns="0" tIns="0" rIns="0" bIns="0" rtlCol="0" anchor="ctr"/>
+          <a:lstStyle/>
+          <a:p>
+            <a:pPr algn="r" indent="0" marL="0">
+              <a:buNone/>
+            </a:pPr>
+            <a:r>
+              <a:rPr lang="en-US" sz="750" dirty="0">
+                <a:solidFill>
+                  <a:srgbClr val="97A9AF"/>
+                </a:solidFill>
+                <a:latin typeface="Meiryo" pitchFamily="34" charset="0"/>
+                <a:ea typeface="Meiryo" pitchFamily="34" charset="-122"/>
+                <a:cs typeface="Meiryo" pitchFamily="34" charset="-120"/>
+              </a:rPr>
+              <a:t>鹿児島のパーキンソン病専門トレーニングスタジオ</a:t>
+            </a:r>
+            <a:endParaRPr lang="en-US" sz="750" dirty="0"/>
+          </a:p>
+        </p:txBody>
+      </p:sp>
+      <p:sp>
+        <p:nvSpPr>
+          <p:cNvPr id="4" name="Text 1"/>
+          <p:cNvSpPr/>
+          <p:nvPr/>
+        </p:nvSpPr>
+        <p:spPr>
+          <a:xfrm>
+            <a:off x="548640" y="292608"/>
+            <a:ext cx="11064240" cy="731520"/>
+          </a:xfrm>
+          <a:prstGeom prst="rect">
+            <a:avLst/>
+          </a:prstGeom>
+          <a:noFill/>
+          <a:ln/>
+        </p:spPr>
+        <p:txBody>
+          <a:bodyPr wrap="square" lIns="0" tIns="0" rIns="0" bIns="0" rtlCol="0" anchor="ctr"/>
+          <a:lstStyle/>
+          <a:p>
+            <a:pPr indent="0" marL="0">
+              <a:buNone/>
+            </a:pPr>
+            <a:r>
+              <a:rPr lang="en-US" sz="3400" b="1" dirty="0">
+                <a:solidFill>
+                  <a:srgbClr val="264653"/>
+                </a:solidFill>
+                <a:latin typeface="Meiryo" pitchFamily="34" charset="0"/>
+                <a:ea typeface="Meiryo" pitchFamily="34" charset="-122"/>
+                <a:cs typeface="Meiryo" pitchFamily="34" charset="-120"/>
+              </a:rPr>
+              <a:t>番号でお知らせください</a:t>
+            </a:r>
+            <a:endParaRPr lang="en-US" sz="3400" dirty="0"/>
+          </a:p>
+        </p:txBody>
+      </p:sp>
+      <p:sp>
+        <p:nvSpPr>
+          <p:cNvPr id="5" name="Text 2"/>
+          <p:cNvSpPr/>
+          <p:nvPr/>
+        </p:nvSpPr>
+        <p:spPr>
+          <a:xfrm>
+            <a:off x="566928" y="1042416"/>
+            <a:ext cx="11064240" cy="365760"/>
+          </a:xfrm>
+          <a:prstGeom prst="rect">
+            <a:avLst/>
+          </a:prstGeom>
+          <a:noFill/>
+          <a:ln/>
+        </p:spPr>
+        <p:txBody>
+          <a:bodyPr wrap="square" lIns="0" tIns="0" rIns="0" bIns="0" rtlCol="0" anchor="ctr"/>
+          <a:lstStyle/>
+          <a:p>
+            <a:pPr indent="0" marL="0">
+              <a:buNone/>
+            </a:pPr>
+            <a:r>
+              <a:rPr lang="en-US" sz="1600" dirty="0">
+                <a:solidFill>
+                  <a:srgbClr val="5E7681"/>
+                </a:solidFill>
+                <a:latin typeface="Meiryo" pitchFamily="34" charset="0"/>
+                <a:ea typeface="Meiryo" pitchFamily="34" charset="-122"/>
+                <a:cs typeface="Meiryo" pitchFamily="34" charset="-120"/>
+              </a:rPr>
+              <a:t>この資料の中で、見出しに番号を付けています</a:t>
+            </a:r>
+            <a:endParaRPr lang="en-US" sz="1600" dirty="0"/>
+          </a:p>
+        </p:txBody>
+      </p:sp>
+      <p:sp>
+        <p:nvSpPr>
+          <p:cNvPr id="6" name="Text 3"/>
+          <p:cNvSpPr/>
+          <p:nvPr/>
+        </p:nvSpPr>
+        <p:spPr>
+          <a:xfrm>
+            <a:off x="11338560" y="6309360"/>
+            <a:ext cx="457200" cy="274320"/>
+          </a:xfrm>
+          <a:prstGeom prst="rect">
+            <a:avLst/>
+          </a:prstGeom>
+          <a:noFill/>
+          <a:ln/>
+        </p:spPr>
+        <p:txBody>
+          <a:bodyPr wrap="square" lIns="0" tIns="0" rIns="0" bIns="0" rtlCol="0" anchor="ctr"/>
+          <a:lstStyle/>
+          <a:p>
+            <a:pPr algn="r" indent="0" marL="0">
+              <a:buNone/>
+            </a:pPr>
+            <a:r>
+              <a:rPr lang="en-US" sz="1100" dirty="0">
+                <a:solidFill>
+                  <a:srgbClr val="A8B4B8"/>
+                </a:solidFill>
+                <a:latin typeface="Meiryo" pitchFamily="34" charset="0"/>
+                <a:ea typeface="Meiryo" pitchFamily="34" charset="-122"/>
+                <a:cs typeface="Meiryo" pitchFamily="34" charset="-120"/>
+              </a:rPr>
+              <a:t>10</a:t>
+            </a:r>
+            <a:endParaRPr lang="en-US" sz="1100" dirty="0"/>
+          </a:p>
+        </p:txBody>
+      </p:sp>
+      <p:pic>
+        <p:nvPicPr>
+          <p:cNvPr id="7" name="Image 1" descr="/sessions/compassionate-sweet-heisenberg/mnt/dev-aspath-life-main/_wp移行素材/★引継ぎ資料/画像/Y07_ページの番号.jpg">    </p:cNvPr>
+          <p:cNvPicPr>
+            <a:picLocks noChangeAspect="1"/>
+          </p:cNvPicPr>
+          <p:nvPr/>
+        </p:nvPicPr>
+        <p:blipFill>
+          <a:blip r:embed="rId2"/>
+          <a:stretch>
+            <a:fillRect/>
+          </a:stretch>
+        </p:blipFill>
+        <p:spPr>
+          <a:xfrm>
             <a:off x="1463040" y="1645920"/>
             <a:ext cx="4937760" cy="4585063"/>
           </a:xfrm>
@@ -2805,7 +3113,7 @@
       </p:pic>
       <p:sp>
         <p:nvSpPr>
-          <p:cNvPr id="6" name="Shape 3"/>
+          <p:cNvPr id="8" name="Shape 4"/>
           <p:cNvSpPr/>
           <p:nvPr/>
         </p:nvSpPr>
@@ -2827,7 +3135,7 @@
       </p:sp>
       <p:sp>
         <p:nvSpPr>
-          <p:cNvPr id="7" name="Text 4"/>
+          <p:cNvPr id="9" name="Text 5"/>
           <p:cNvSpPr/>
           <p:nvPr/>
         </p:nvSpPr>
@@ -2866,7 +3174,7 @@
       </p:sp>
       <p:sp>
         <p:nvSpPr>
-          <p:cNvPr id="8" name="Shape 5"/>
+          <p:cNvPr id="10" name="Shape 6"/>
           <p:cNvSpPr/>
           <p:nvPr/>
         </p:nvSpPr>
@@ -2888,7 +3196,7 @@
       </p:sp>
       <p:sp>
         <p:nvSpPr>
-          <p:cNvPr id="9" name="Text 6"/>
+          <p:cNvPr id="11" name="Text 7"/>
           <p:cNvSpPr/>
           <p:nvPr/>
         </p:nvSpPr>
@@ -2927,7 +3235,7 @@
       </p:sp>
       <p:sp>
         <p:nvSpPr>
-          <p:cNvPr id="10" name="Text 7"/>
+          <p:cNvPr id="12" name="Text 8"/>
           <p:cNvSpPr/>
           <p:nvPr/>
         </p:nvSpPr>
@@ -2966,7 +3274,7 @@
       </p:sp>
       <p:sp>
         <p:nvSpPr>
-          <p:cNvPr id="11" name="Shape 8"/>
+          <p:cNvPr id="13" name="Shape 9"/>
           <p:cNvSpPr/>
           <p:nvPr/>
         </p:nvSpPr>
@@ -2988,7 +3296,7 @@
       </p:sp>
       <p:sp>
         <p:nvSpPr>
-          <p:cNvPr id="12" name="Text 9"/>
+          <p:cNvPr id="14" name="Text 10"/>
           <p:cNvSpPr/>
           <p:nvPr/>
         </p:nvSpPr>
@@ -3027,7 +3335,7 @@
       </p:sp>
       <p:sp>
         <p:nvSpPr>
-          <p:cNvPr id="13" name="Text 10"/>
+          <p:cNvPr id="15" name="Text 11"/>
           <p:cNvSpPr/>
           <p:nvPr/>
         </p:nvSpPr>
@@ -3066,7 +3374,7 @@
       </p:sp>
       <p:sp>
         <p:nvSpPr>
-          <p:cNvPr id="14" name="Shape 11"/>
+          <p:cNvPr id="16" name="Shape 12"/>
           <p:cNvSpPr/>
           <p:nvPr/>
         </p:nvSpPr>
@@ -3088,7 +3396,7 @@
       </p:sp>
       <p:sp>
         <p:nvSpPr>
-          <p:cNvPr id="15" name="Text 12"/>
+          <p:cNvPr id="17" name="Text 13"/>
           <p:cNvSpPr/>
           <p:nvPr/>
         </p:nvSpPr>
@@ -3127,7 +3435,7 @@
       </p:sp>
       <p:sp>
         <p:nvSpPr>
-          <p:cNvPr id="16" name="Text 13"/>
+          <p:cNvPr id="18" name="Text 14"/>
           <p:cNvSpPr/>
           <p:nvPr/>
         </p:nvSpPr>
@@ -3166,7 +3474,7 @@
       </p:sp>
       <p:sp>
         <p:nvSpPr>
-          <p:cNvPr id="17" name="Shape 14"/>
+          <p:cNvPr id="19" name="Shape 15"/>
           <p:cNvSpPr/>
           <p:nvPr/>
         </p:nvSpPr>
@@ -3188,7 +3496,7 @@
       </p:sp>
       <p:sp>
         <p:nvSpPr>
-          <p:cNvPr id="18" name="Text 15"/>
+          <p:cNvPr id="20" name="Text 16"/>
           <p:cNvSpPr/>
           <p:nvPr/>
         </p:nvSpPr>
@@ -3227,7 +3535,7 @@
       </p:sp>
       <p:sp>
         <p:nvSpPr>
-          <p:cNvPr id="19" name="Text 16"/>
+          <p:cNvPr id="21" name="Text 17"/>
           <p:cNvSpPr/>
           <p:nvPr/>
         </p:nvSpPr>
@@ -3266,7 +3574,7 @@
       </p:sp>
       <p:sp>
         <p:nvSpPr>
-          <p:cNvPr id="20" name="Shape 17"/>
+          <p:cNvPr id="22" name="Shape 18"/>
           <p:cNvSpPr/>
           <p:nvPr/>
         </p:nvSpPr>
@@ -3288,7 +3596,7 @@
       </p:sp>
       <p:sp>
         <p:nvSpPr>
-          <p:cNvPr id="21" name="Text 18"/>
+          <p:cNvPr id="23" name="Text 19"/>
           <p:cNvSpPr/>
           <p:nvPr/>
         </p:nvSpPr>
@@ -3327,7 +3635,7 @@
       </p:sp>
       <p:sp>
         <p:nvSpPr>
-          <p:cNvPr id="22" name="Text 19"/>
+          <p:cNvPr id="24" name="Text 20"/>
           <p:cNvSpPr/>
           <p:nvPr/>
         </p:nvSpPr>
@@ -3366,7 +3674,7 @@
       </p:sp>
       <p:sp>
         <p:nvSpPr>
-          <p:cNvPr id="23" name="Shape 20"/>
+          <p:cNvPr id="25" name="Shape 21"/>
           <p:cNvSpPr/>
           <p:nvPr/>
         </p:nvSpPr>
@@ -3388,7 +3696,7 @@
       </p:sp>
       <p:sp>
         <p:nvSpPr>
-          <p:cNvPr id="24" name="Text 21"/>
+          <p:cNvPr id="26" name="Text 22"/>
           <p:cNvSpPr/>
           <p:nvPr/>
         </p:nvSpPr>
@@ -3427,7 +3735,7 @@
       </p:sp>
       <p:sp>
         <p:nvSpPr>
-          <p:cNvPr id="25" name="Text 22"/>
+          <p:cNvPr id="27" name="Text 23"/>
           <p:cNvSpPr/>
           <p:nvPr/>
         </p:nvSpPr>
@@ -3466,7 +3774,7 @@
       </p:sp>
       <p:sp>
         <p:nvSpPr>
-          <p:cNvPr id="26" name="Shape 23"/>
+          <p:cNvPr id="28" name="Shape 24"/>
           <p:cNvSpPr/>
           <p:nvPr/>
         </p:nvSpPr>
@@ -3488,7 +3796,7 @@
       </p:sp>
       <p:sp>
         <p:nvSpPr>
-          <p:cNvPr id="27" name="Text 24"/>
+          <p:cNvPr id="29" name="Text 25"/>
           <p:cNvSpPr/>
           <p:nvPr/>
         </p:nvSpPr>
@@ -3527,7 +3835,7 @@
       </p:sp>
       <p:sp>
         <p:nvSpPr>
-          <p:cNvPr id="28" name="Text 25"/>
+          <p:cNvPr id="30" name="Text 26"/>
           <p:cNvSpPr/>
           <p:nvPr/>
         </p:nvSpPr>
@@ -3566,7 +3874,7 @@
       </p:sp>
       <p:sp>
         <p:nvSpPr>
-          <p:cNvPr id="29" name="Shape 26"/>
+          <p:cNvPr id="31" name="Shape 27"/>
           <p:cNvSpPr/>
           <p:nvPr/>
         </p:nvSpPr>
@@ -3588,7 +3896,7 @@
       </p:sp>
       <p:sp>
         <p:nvSpPr>
-          <p:cNvPr id="30" name="Text 27"/>
+          <p:cNvPr id="32" name="Text 28"/>
           <p:cNvSpPr/>
           <p:nvPr/>
         </p:nvSpPr>
@@ -3627,7 +3935,7 @@
       </p:sp>
       <p:sp>
         <p:nvSpPr>
-          <p:cNvPr id="31" name="Text 28"/>
+          <p:cNvPr id="33" name="Text 29"/>
           <p:cNvSpPr/>
           <p:nvPr/>
         </p:nvSpPr>
@@ -3666,7 +3974,7 @@
       </p:sp>
       <p:sp>
         <p:nvSpPr>
-          <p:cNvPr id="32" name="Shape 29"/>
+          <p:cNvPr id="34" name="Shape 30"/>
           <p:cNvSpPr/>
           <p:nvPr/>
         </p:nvSpPr>
@@ -3688,7 +3996,7 @@
       </p:sp>
       <p:sp>
         <p:nvSpPr>
-          <p:cNvPr id="33" name="Text 30"/>
+          <p:cNvPr id="35" name="Text 31"/>
           <p:cNvSpPr/>
           <p:nvPr/>
         </p:nvSpPr>
@@ -3727,7 +4035,7 @@
       </p:sp>
       <p:sp>
         <p:nvSpPr>
-          <p:cNvPr id="34" name="Text 31"/>
+          <p:cNvPr id="36" name="Text 32"/>
           <p:cNvSpPr/>
           <p:nvPr/>
         </p:nvSpPr>
@@ -3796,9 +4104,72 @@
           <a:chExt cx="0" cy="0"/>
         </a:xfrm>
       </p:grpSpPr>
-      <p:sp>
-        <p:nvSpPr>
-          <p:cNvPr id="2" name="Text 0"/>
+      <p:pic>
+        <p:nvPicPr>
+          <p:cNvPr id="2" name="Image 0" descr="/sessions/compassionate-sweet-heisenberg/mnt/dev-aspath-life-main/tools/assets/logo-deck.png">    </p:cNvPr>
+          <p:cNvPicPr>
+            <a:picLocks noChangeAspect="1"/>
+          </p:cNvPicPr>
+          <p:nvPr/>
+        </p:nvPicPr>
+        <p:blipFill>
+          <a:blip r:embed="rId1"/>
+          <a:stretch>
+            <a:fillRect/>
+          </a:stretch>
+        </p:blipFill>
+        <p:spPr>
+          <a:xfrm>
+            <a:off x="11458173" y="109728"/>
+            <a:ext cx="209571" cy="256032"/>
+          </a:xfrm>
+          <a:prstGeom prst="rect">
+            <a:avLst/>
+          </a:prstGeom>
+        </p:spPr>
+      </p:pic>
+      <p:sp>
+        <p:nvSpPr>
+          <p:cNvPr id="3" name="Text 0"/>
+          <p:cNvSpPr txBox="1"/>
+          <p:nvPr/>
+        </p:nvSpPr>
+        <p:spPr>
+          <a:xfrm>
+            <a:off x="8623533" y="128016"/>
+            <a:ext cx="2743200" cy="237744"/>
+          </a:xfrm>
+          <a:prstGeom prst="rect">
+            <a:avLst/>
+          </a:prstGeom>
+          <a:noFill/>
+          <a:ln/>
+        </p:spPr>
+        <p:txBody>
+          <a:bodyPr wrap="square" lIns="0" tIns="0" rIns="0" bIns="0" rtlCol="0" anchor="ctr"/>
+          <a:lstStyle/>
+          <a:p>
+            <a:pPr algn="r" indent="0" marL="0">
+              <a:buNone/>
+            </a:pPr>
+            <a:r>
+              <a:rPr lang="en-US" sz="750" dirty="0">
+                <a:solidFill>
+                  <a:srgbClr val="97A9AF"/>
+                </a:solidFill>
+                <a:latin typeface="Meiryo" pitchFamily="34" charset="0"/>
+                <a:ea typeface="Meiryo" pitchFamily="34" charset="-122"/>
+                <a:cs typeface="Meiryo" pitchFamily="34" charset="-120"/>
+              </a:rPr>
+              <a:t>鹿児島のパーキンソン病専門トレーニングスタジオ</a:t>
+            </a:r>
+            <a:endParaRPr lang="en-US" sz="750" dirty="0"/>
+          </a:p>
+        </p:txBody>
+      </p:sp>
+      <p:sp>
+        <p:nvSpPr>
+          <p:cNvPr id="4" name="Text 1"/>
           <p:cNvSpPr/>
           <p:nvPr/>
         </p:nvSpPr>
@@ -3837,7 +4208,7 @@
       </p:sp>
       <p:sp>
         <p:nvSpPr>
-          <p:cNvPr id="3" name="Text 1"/>
+          <p:cNvPr id="5" name="Text 2"/>
           <p:cNvSpPr/>
           <p:nvPr/>
         </p:nvSpPr>
@@ -3876,7 +4247,7 @@
       </p:sp>
       <p:sp>
         <p:nvSpPr>
-          <p:cNvPr id="4" name="Text 2"/>
+          <p:cNvPr id="6" name="Text 3"/>
           <p:cNvSpPr/>
           <p:nvPr/>
         </p:nvSpPr>
@@ -3915,7 +4286,7 @@
       </p:sp>
       <p:sp>
         <p:nvSpPr>
-          <p:cNvPr id="5" name="Shape 3"/>
+          <p:cNvPr id="7" name="Shape 4"/>
           <p:cNvSpPr/>
           <p:nvPr/>
         </p:nvSpPr>
@@ -3937,7 +4308,7 @@
       </p:sp>
       <p:sp>
         <p:nvSpPr>
-          <p:cNvPr id="6" name="Text 4"/>
+          <p:cNvPr id="8" name="Text 5"/>
           <p:cNvSpPr/>
           <p:nvPr/>
         </p:nvSpPr>
@@ -3976,7 +4347,7 @@
       </p:sp>
       <p:sp>
         <p:nvSpPr>
-          <p:cNvPr id="7" name="Text 5"/>
+          <p:cNvPr id="9" name="Text 6"/>
           <p:cNvSpPr/>
           <p:nvPr/>
         </p:nvSpPr>
@@ -4078,7 +4449,7 @@
       </p:sp>
       <p:sp>
         <p:nvSpPr>
-          <p:cNvPr id="8" name="Shape 6"/>
+          <p:cNvPr id="10" name="Shape 7"/>
           <p:cNvSpPr/>
           <p:nvPr/>
         </p:nvSpPr>
@@ -4100,7 +4471,7 @@
       </p:sp>
       <p:sp>
         <p:nvSpPr>
-          <p:cNvPr id="9" name="Text 7"/>
+          <p:cNvPr id="11" name="Text 8"/>
           <p:cNvSpPr/>
           <p:nvPr/>
         </p:nvSpPr>
@@ -4139,7 +4510,7 @@
       </p:sp>
       <p:sp>
         <p:nvSpPr>
-          <p:cNvPr id="10" name="Text 8"/>
+          <p:cNvPr id="12" name="Text 9"/>
           <p:cNvSpPr/>
           <p:nvPr/>
         </p:nvSpPr>
@@ -4241,7 +4612,7 @@
       </p:sp>
       <p:sp>
         <p:nvSpPr>
-          <p:cNvPr id="11" name="Text 9"/>
+          <p:cNvPr id="13" name="Text 10"/>
           <p:cNvSpPr/>
           <p:nvPr/>
         </p:nvSpPr>
@@ -4280,7 +4651,7 @@
       </p:sp>
       <p:sp>
         <p:nvSpPr>
-          <p:cNvPr id="12" name="Text 10"/>
+          <p:cNvPr id="14" name="Text 11"/>
           <p:cNvSpPr/>
           <p:nvPr/>
         </p:nvSpPr>
@@ -4416,9 +4787,72 @@
           <a:chExt cx="0" cy="0"/>
         </a:xfrm>
       </p:grpSpPr>
-      <p:sp>
-        <p:nvSpPr>
-          <p:cNvPr id="2" name="Text 0"/>
+      <p:pic>
+        <p:nvPicPr>
+          <p:cNvPr id="2" name="Image 0" descr="/sessions/compassionate-sweet-heisenberg/mnt/dev-aspath-life-main/tools/assets/logo-deck.png">    </p:cNvPr>
+          <p:cNvPicPr>
+            <a:picLocks noChangeAspect="1"/>
+          </p:cNvPicPr>
+          <p:nvPr/>
+        </p:nvPicPr>
+        <p:blipFill>
+          <a:blip r:embed="rId1"/>
+          <a:stretch>
+            <a:fillRect/>
+          </a:stretch>
+        </p:blipFill>
+        <p:spPr>
+          <a:xfrm>
+            <a:off x="11458173" y="109728"/>
+            <a:ext cx="209571" cy="256032"/>
+          </a:xfrm>
+          <a:prstGeom prst="rect">
+            <a:avLst/>
+          </a:prstGeom>
+        </p:spPr>
+      </p:pic>
+      <p:sp>
+        <p:nvSpPr>
+          <p:cNvPr id="3" name="Text 0"/>
+          <p:cNvSpPr txBox="1"/>
+          <p:nvPr/>
+        </p:nvSpPr>
+        <p:spPr>
+          <a:xfrm>
+            <a:off x="8623533" y="128016"/>
+            <a:ext cx="2743200" cy="237744"/>
+          </a:xfrm>
+          <a:prstGeom prst="rect">
+            <a:avLst/>
+          </a:prstGeom>
+          <a:noFill/>
+          <a:ln/>
+        </p:spPr>
+        <p:txBody>
+          <a:bodyPr wrap="square" lIns="0" tIns="0" rIns="0" bIns="0" rtlCol="0" anchor="ctr"/>
+          <a:lstStyle/>
+          <a:p>
+            <a:pPr algn="r" indent="0" marL="0">
+              <a:buNone/>
+            </a:pPr>
+            <a:r>
+              <a:rPr lang="en-US" sz="750" dirty="0">
+                <a:solidFill>
+                  <a:srgbClr val="97A9AF"/>
+                </a:solidFill>
+                <a:latin typeface="Meiryo" pitchFamily="34" charset="0"/>
+                <a:ea typeface="Meiryo" pitchFamily="34" charset="-122"/>
+                <a:cs typeface="Meiryo" pitchFamily="34" charset="-120"/>
+              </a:rPr>
+              <a:t>鹿児島のパーキンソン病専門トレーニングスタジオ</a:t>
+            </a:r>
+            <a:endParaRPr lang="en-US" sz="750" dirty="0"/>
+          </a:p>
+        </p:txBody>
+      </p:sp>
+      <p:sp>
+        <p:nvSpPr>
+          <p:cNvPr id="4" name="Text 1"/>
           <p:cNvSpPr/>
           <p:nvPr/>
         </p:nvSpPr>
@@ -4457,7 +4891,7 @@
       </p:sp>
       <p:sp>
         <p:nvSpPr>
-          <p:cNvPr id="3" name="Text 1"/>
+          <p:cNvPr id="5" name="Text 2"/>
           <p:cNvSpPr/>
           <p:nvPr/>
         </p:nvSpPr>
@@ -4496,7 +4930,7 @@
       </p:sp>
       <p:sp>
         <p:nvSpPr>
-          <p:cNvPr id="4" name="Text 2"/>
+          <p:cNvPr id="6" name="Text 3"/>
           <p:cNvSpPr/>
           <p:nvPr/>
         </p:nvSpPr>
@@ -5393,7 +5827,7 @@
       </p:graphicFrame>
       <p:sp>
         <p:nvSpPr>
-          <p:cNvPr id="6" name="Shape 3"/>
+          <p:cNvPr id="8" name="Shape 4"/>
           <p:cNvSpPr/>
           <p:nvPr/>
         </p:nvSpPr>
@@ -5415,7 +5849,7 @@
       </p:sp>
       <p:sp>
         <p:nvSpPr>
-          <p:cNvPr id="7" name="Text 4"/>
+          <p:cNvPr id="9" name="Text 5"/>
           <p:cNvSpPr/>
           <p:nvPr/>
         </p:nvSpPr>
@@ -5487,9 +5921,72 @@
           <a:chExt cx="0" cy="0"/>
         </a:xfrm>
       </p:grpSpPr>
-      <p:sp>
-        <p:nvSpPr>
-          <p:cNvPr id="2" name="Text 0"/>
+      <p:pic>
+        <p:nvPicPr>
+          <p:cNvPr id="2" name="Image 0" descr="/sessions/compassionate-sweet-heisenberg/mnt/dev-aspath-life-main/tools/assets/logo-deck-white.png">    </p:cNvPr>
+          <p:cNvPicPr>
+            <a:picLocks noChangeAspect="1"/>
+          </p:cNvPicPr>
+          <p:nvPr/>
+        </p:nvPicPr>
+        <p:blipFill>
+          <a:blip r:embed="rId1"/>
+          <a:stretch>
+            <a:fillRect/>
+          </a:stretch>
+        </p:blipFill>
+        <p:spPr>
+          <a:xfrm>
+            <a:off x="11458173" y="109728"/>
+            <a:ext cx="209571" cy="256032"/>
+          </a:xfrm>
+          <a:prstGeom prst="rect">
+            <a:avLst/>
+          </a:prstGeom>
+        </p:spPr>
+      </p:pic>
+      <p:sp>
+        <p:nvSpPr>
+          <p:cNvPr id="3" name="Text 0"/>
+          <p:cNvSpPr txBox="1"/>
+          <p:nvPr/>
+        </p:nvSpPr>
+        <p:spPr>
+          <a:xfrm>
+            <a:off x="8623533" y="128016"/>
+            <a:ext cx="2743200" cy="237744"/>
+          </a:xfrm>
+          <a:prstGeom prst="rect">
+            <a:avLst/>
+          </a:prstGeom>
+          <a:noFill/>
+          <a:ln/>
+        </p:spPr>
+        <p:txBody>
+          <a:bodyPr wrap="square" lIns="0" tIns="0" rIns="0" bIns="0" rtlCol="0" anchor="ctr"/>
+          <a:lstStyle/>
+          <a:p>
+            <a:pPr algn="r" indent="0" marL="0">
+              <a:buNone/>
+            </a:pPr>
+            <a:r>
+              <a:rPr lang="en-US" sz="750" dirty="0">
+                <a:solidFill>
+                  <a:srgbClr val="9FBAC1"/>
+                </a:solidFill>
+                <a:latin typeface="Meiryo" pitchFamily="34" charset="0"/>
+                <a:ea typeface="Meiryo" pitchFamily="34" charset="-122"/>
+                <a:cs typeface="Meiryo" pitchFamily="34" charset="-120"/>
+              </a:rPr>
+              <a:t>鹿児島のパーキンソン病専門トレーニングスタジオ</a:t>
+            </a:r>
+            <a:endParaRPr lang="en-US" sz="750" dirty="0"/>
+          </a:p>
+        </p:txBody>
+      </p:sp>
+      <p:sp>
+        <p:nvSpPr>
+          <p:cNvPr id="4" name="Text 1"/>
           <p:cNvSpPr/>
           <p:nvPr/>
         </p:nvSpPr>
@@ -5528,7 +6025,7 @@
       </p:sp>
       <p:sp>
         <p:nvSpPr>
-          <p:cNvPr id="3" name="Text 1"/>
+          <p:cNvPr id="5" name="Text 2"/>
           <p:cNvSpPr/>
           <p:nvPr/>
         </p:nvSpPr>
@@ -5567,7 +6064,7 @@
       </p:sp>
       <p:sp>
         <p:nvSpPr>
-          <p:cNvPr id="4" name="Text 2"/>
+          <p:cNvPr id="6" name="Text 3"/>
           <p:cNvSpPr/>
           <p:nvPr/>
         </p:nvSpPr>
@@ -5606,7 +6103,7 @@
       </p:sp>
       <p:sp>
         <p:nvSpPr>
-          <p:cNvPr id="5" name="Shape 3"/>
+          <p:cNvPr id="7" name="Shape 4"/>
           <p:cNvSpPr/>
           <p:nvPr/>
         </p:nvSpPr>
@@ -5628,7 +6125,7 @@
       </p:sp>
       <p:sp>
         <p:nvSpPr>
-          <p:cNvPr id="6" name="Text 4"/>
+          <p:cNvPr id="8" name="Text 5"/>
           <p:cNvSpPr/>
           <p:nvPr/>
         </p:nvSpPr>
@@ -5667,7 +6164,7 @@
       </p:sp>
       <p:sp>
         <p:nvSpPr>
-          <p:cNvPr id="7" name="Text 5"/>
+          <p:cNvPr id="9" name="Text 6"/>
           <p:cNvSpPr/>
           <p:nvPr/>
         </p:nvSpPr>
@@ -5706,7 +6203,7 @@
       </p:sp>
       <p:sp>
         <p:nvSpPr>
-          <p:cNvPr id="8" name="Shape 6"/>
+          <p:cNvPr id="10" name="Shape 7"/>
           <p:cNvSpPr/>
           <p:nvPr/>
         </p:nvSpPr>
@@ -5728,7 +6225,7 @@
       </p:sp>
       <p:sp>
         <p:nvSpPr>
-          <p:cNvPr id="9" name="Text 7"/>
+          <p:cNvPr id="11" name="Text 8"/>
           <p:cNvSpPr/>
           <p:nvPr/>
         </p:nvSpPr>
@@ -5767,7 +6264,7 @@
       </p:sp>
       <p:sp>
         <p:nvSpPr>
-          <p:cNvPr id="10" name="Text 8"/>
+          <p:cNvPr id="12" name="Text 9"/>
           <p:cNvSpPr/>
           <p:nvPr/>
         </p:nvSpPr>
@@ -5806,7 +6303,7 @@
       </p:sp>
       <p:sp>
         <p:nvSpPr>
-          <p:cNvPr id="11" name="Shape 9"/>
+          <p:cNvPr id="13" name="Shape 10"/>
           <p:cNvSpPr/>
           <p:nvPr/>
         </p:nvSpPr>
@@ -5828,7 +6325,7 @@
       </p:sp>
       <p:sp>
         <p:nvSpPr>
-          <p:cNvPr id="12" name="Text 10"/>
+          <p:cNvPr id="14" name="Text 11"/>
           <p:cNvSpPr/>
           <p:nvPr/>
         </p:nvSpPr>
@@ -5867,7 +6364,7 @@
       </p:sp>
       <p:sp>
         <p:nvSpPr>
-          <p:cNvPr id="13" name="Text 11"/>
+          <p:cNvPr id="15" name="Text 12"/>
           <p:cNvSpPr/>
           <p:nvPr/>
         </p:nvSpPr>
@@ -5906,7 +6403,7 @@
       </p:sp>
       <p:sp>
         <p:nvSpPr>
-          <p:cNvPr id="14" name="Text 12"/>
+          <p:cNvPr id="16" name="Text 13"/>
           <p:cNvSpPr/>
           <p:nvPr/>
         </p:nvSpPr>
@@ -5975,9 +6472,72 @@
           <a:chExt cx="0" cy="0"/>
         </a:xfrm>
       </p:grpSpPr>
-      <p:sp>
-        <p:nvSpPr>
-          <p:cNvPr id="2" name="Text 0"/>
+      <p:pic>
+        <p:nvPicPr>
+          <p:cNvPr id="2" name="Image 0" descr="/sessions/compassionate-sweet-heisenberg/mnt/dev-aspath-life-main/tools/assets/logo-deck.png">    </p:cNvPr>
+          <p:cNvPicPr>
+            <a:picLocks noChangeAspect="1"/>
+          </p:cNvPicPr>
+          <p:nvPr/>
+        </p:nvPicPr>
+        <p:blipFill>
+          <a:blip r:embed="rId1"/>
+          <a:stretch>
+            <a:fillRect/>
+          </a:stretch>
+        </p:blipFill>
+        <p:spPr>
+          <a:xfrm>
+            <a:off x="11458173" y="109728"/>
+            <a:ext cx="209571" cy="256032"/>
+          </a:xfrm>
+          <a:prstGeom prst="rect">
+            <a:avLst/>
+          </a:prstGeom>
+        </p:spPr>
+      </p:pic>
+      <p:sp>
+        <p:nvSpPr>
+          <p:cNvPr id="3" name="Text 0"/>
+          <p:cNvSpPr txBox="1"/>
+          <p:nvPr/>
+        </p:nvSpPr>
+        <p:spPr>
+          <a:xfrm>
+            <a:off x="8623533" y="128016"/>
+            <a:ext cx="2743200" cy="237744"/>
+          </a:xfrm>
+          <a:prstGeom prst="rect">
+            <a:avLst/>
+          </a:prstGeom>
+          <a:noFill/>
+          <a:ln/>
+        </p:spPr>
+        <p:txBody>
+          <a:bodyPr wrap="square" lIns="0" tIns="0" rIns="0" bIns="0" rtlCol="0" anchor="ctr"/>
+          <a:lstStyle/>
+          <a:p>
+            <a:pPr algn="r" indent="0" marL="0">
+              <a:buNone/>
+            </a:pPr>
+            <a:r>
+              <a:rPr lang="en-US" sz="750" dirty="0">
+                <a:solidFill>
+                  <a:srgbClr val="97A9AF"/>
+                </a:solidFill>
+                <a:latin typeface="Meiryo" pitchFamily="34" charset="0"/>
+                <a:ea typeface="Meiryo" pitchFamily="34" charset="-122"/>
+                <a:cs typeface="Meiryo" pitchFamily="34" charset="-120"/>
+              </a:rPr>
+              <a:t>鹿児島のパーキンソン病専門トレーニングスタジオ</a:t>
+            </a:r>
+            <a:endParaRPr lang="en-US" sz="750" dirty="0"/>
+          </a:p>
+        </p:txBody>
+      </p:sp>
+      <p:sp>
+        <p:nvSpPr>
+          <p:cNvPr id="4" name="Text 1"/>
           <p:cNvSpPr/>
           <p:nvPr/>
         </p:nvSpPr>
@@ -6016,7 +6576,7 @@
       </p:sp>
       <p:sp>
         <p:nvSpPr>
-          <p:cNvPr id="3" name="Text 1"/>
+          <p:cNvPr id="5" name="Text 2"/>
           <p:cNvSpPr/>
           <p:nvPr/>
         </p:nvSpPr>
@@ -6055,7 +6615,7 @@
       </p:sp>
       <p:sp>
         <p:nvSpPr>
-          <p:cNvPr id="4" name="Text 2"/>
+          <p:cNvPr id="6" name="Text 3"/>
           <p:cNvSpPr/>
           <p:nvPr/>
         </p:nvSpPr>
@@ -6094,7 +6654,7 @@
       </p:sp>
       <p:sp>
         <p:nvSpPr>
-          <p:cNvPr id="5" name="Shape 3"/>
+          <p:cNvPr id="7" name="Shape 4"/>
           <p:cNvSpPr/>
           <p:nvPr/>
         </p:nvSpPr>
@@ -6116,7 +6676,7 @@
       </p:sp>
       <p:sp>
         <p:nvSpPr>
-          <p:cNvPr id="6" name="Shape 4"/>
+          <p:cNvPr id="8" name="Shape 5"/>
           <p:cNvSpPr/>
           <p:nvPr/>
         </p:nvSpPr>
@@ -6138,7 +6698,7 @@
       </p:sp>
       <p:sp>
         <p:nvSpPr>
-          <p:cNvPr id="7" name="Shape 5"/>
+          <p:cNvPr id="9" name="Shape 6"/>
           <p:cNvSpPr/>
           <p:nvPr/>
         </p:nvSpPr>
@@ -6158,7 +6718,7 @@
       </p:sp>
       <p:sp>
         <p:nvSpPr>
-          <p:cNvPr id="8" name="Text 6"/>
+          <p:cNvPr id="10" name="Text 7"/>
           <p:cNvSpPr/>
           <p:nvPr/>
         </p:nvSpPr>
@@ -6197,7 +6757,7 @@
       </p:sp>
       <p:sp>
         <p:nvSpPr>
-          <p:cNvPr id="9" name="Text 7"/>
+          <p:cNvPr id="11" name="Text 8"/>
           <p:cNvSpPr/>
           <p:nvPr/>
         </p:nvSpPr>
@@ -6236,7 +6796,7 @@
       </p:sp>
       <p:sp>
         <p:nvSpPr>
-          <p:cNvPr id="10" name="Text 8"/>
+          <p:cNvPr id="12" name="Text 9"/>
           <p:cNvSpPr/>
           <p:nvPr/>
         </p:nvSpPr>
@@ -6298,7 +6858,7 @@
       </p:sp>
       <p:sp>
         <p:nvSpPr>
-          <p:cNvPr id="11" name="Text 9"/>
+          <p:cNvPr id="13" name="Text 10"/>
           <p:cNvSpPr/>
           <p:nvPr/>
         </p:nvSpPr>
@@ -6337,7 +6897,7 @@
       </p:sp>
       <p:sp>
         <p:nvSpPr>
-          <p:cNvPr id="12" name="Shape 10"/>
+          <p:cNvPr id="14" name="Shape 11"/>
           <p:cNvSpPr/>
           <p:nvPr/>
         </p:nvSpPr>
@@ -6359,7 +6919,7 @@
       </p:sp>
       <p:sp>
         <p:nvSpPr>
-          <p:cNvPr id="13" name="Shape 11"/>
+          <p:cNvPr id="15" name="Shape 12"/>
           <p:cNvSpPr/>
           <p:nvPr/>
         </p:nvSpPr>
@@ -6381,7 +6941,7 @@
       </p:sp>
       <p:sp>
         <p:nvSpPr>
-          <p:cNvPr id="14" name="Shape 12"/>
+          <p:cNvPr id="16" name="Shape 13"/>
           <p:cNvSpPr/>
           <p:nvPr/>
         </p:nvSpPr>
@@ -6401,7 +6961,7 @@
       </p:sp>
       <p:sp>
         <p:nvSpPr>
-          <p:cNvPr id="15" name="Text 13"/>
+          <p:cNvPr id="17" name="Text 14"/>
           <p:cNvSpPr/>
           <p:nvPr/>
         </p:nvSpPr>
@@ -6440,7 +7000,7 @@
       </p:sp>
       <p:sp>
         <p:nvSpPr>
-          <p:cNvPr id="16" name="Text 14"/>
+          <p:cNvPr id="18" name="Text 15"/>
           <p:cNvSpPr/>
           <p:nvPr/>
         </p:nvSpPr>
@@ -6479,7 +7039,7 @@
       </p:sp>
       <p:sp>
         <p:nvSpPr>
-          <p:cNvPr id="17" name="Text 15"/>
+          <p:cNvPr id="19" name="Text 16"/>
           <p:cNvSpPr/>
           <p:nvPr/>
         </p:nvSpPr>
@@ -6541,7 +7101,7 @@
       </p:sp>
       <p:sp>
         <p:nvSpPr>
-          <p:cNvPr id="18" name="Text 16"/>
+          <p:cNvPr id="20" name="Text 17"/>
           <p:cNvSpPr/>
           <p:nvPr/>
         </p:nvSpPr>
@@ -6580,7 +7140,7 @@
       </p:sp>
       <p:sp>
         <p:nvSpPr>
-          <p:cNvPr id="19" name="Shape 17"/>
+          <p:cNvPr id="21" name="Shape 18"/>
           <p:cNvSpPr/>
           <p:nvPr/>
         </p:nvSpPr>
@@ -6602,7 +7162,7 @@
       </p:sp>
       <p:sp>
         <p:nvSpPr>
-          <p:cNvPr id="20" name="Text 18"/>
+          <p:cNvPr id="22" name="Text 19"/>
           <p:cNvSpPr/>
           <p:nvPr/>
         </p:nvSpPr>
@@ -6674,126 +7234,9 @@
           <a:chExt cx="0" cy="0"/>
         </a:xfrm>
       </p:grpSpPr>
-      <p:sp>
-        <p:nvSpPr>
-          <p:cNvPr id="2" name="Text 0"/>
-          <p:cNvSpPr/>
-          <p:nvPr/>
-        </p:nvSpPr>
-        <p:spPr>
-          <a:xfrm>
-            <a:off x="548640" y="292608"/>
-            <a:ext cx="11064240" cy="731520"/>
-          </a:xfrm>
-          <a:prstGeom prst="rect">
-            <a:avLst/>
-          </a:prstGeom>
-          <a:noFill/>
-          <a:ln/>
-        </p:spPr>
-        <p:txBody>
-          <a:bodyPr wrap="square" lIns="0" tIns="0" rIns="0" bIns="0" rtlCol="0" anchor="ctr"/>
-          <a:lstStyle/>
-          <a:p>
-            <a:pPr indent="0" marL="0">
-              <a:buNone/>
-            </a:pPr>
-            <a:r>
-              <a:rPr lang="en-US" sz="3400" b="1" dirty="0">
-                <a:solidFill>
-                  <a:srgbClr val="264653"/>
-                </a:solidFill>
-                <a:latin typeface="Meiryo" pitchFamily="34" charset="0"/>
-                <a:ea typeface="Meiryo" pitchFamily="34" charset="-122"/>
-                <a:cs typeface="Meiryo" pitchFamily="34" charset="-120"/>
-              </a:rPr>
-              <a:t>記事を新しく書く</a:t>
-            </a:r>
-            <a:endParaRPr lang="en-US" sz="3400" dirty="0"/>
-          </a:p>
-        </p:txBody>
-      </p:sp>
-      <p:sp>
-        <p:nvSpPr>
-          <p:cNvPr id="3" name="Text 1"/>
-          <p:cNvSpPr/>
-          <p:nvPr/>
-        </p:nvSpPr>
-        <p:spPr>
-          <a:xfrm>
-            <a:off x="566928" y="1042416"/>
-            <a:ext cx="11064240" cy="365760"/>
-          </a:xfrm>
-          <a:prstGeom prst="rect">
-            <a:avLst/>
-          </a:prstGeom>
-          <a:noFill/>
-          <a:ln/>
-        </p:spPr>
-        <p:txBody>
-          <a:bodyPr wrap="square" lIns="0" tIns="0" rIns="0" bIns="0" rtlCol="0" anchor="ctr"/>
-          <a:lstStyle/>
-          <a:p>
-            <a:pPr indent="0" marL="0">
-              <a:buNone/>
-            </a:pPr>
-            <a:r>
-              <a:rPr lang="en-US" sz="1600" dirty="0">
-                <a:solidFill>
-                  <a:srgbClr val="5E7681"/>
-                </a:solidFill>
-                <a:latin typeface="Meiryo" pitchFamily="34" charset="0"/>
-                <a:ea typeface="Meiryo" pitchFamily="34" charset="-122"/>
-                <a:cs typeface="Meiryo" pitchFamily="34" charset="-120"/>
-              </a:rPr>
-              <a:t>投稿 → 投稿を追加</a:t>
-            </a:r>
-            <a:endParaRPr lang="en-US" sz="1600" dirty="0"/>
-          </a:p>
-        </p:txBody>
-      </p:sp>
-      <p:sp>
-        <p:nvSpPr>
-          <p:cNvPr id="4" name="Text 2"/>
-          <p:cNvSpPr/>
-          <p:nvPr/>
-        </p:nvSpPr>
-        <p:spPr>
-          <a:xfrm>
-            <a:off x="11338560" y="6309360"/>
-            <a:ext cx="457200" cy="274320"/>
-          </a:xfrm>
-          <a:prstGeom prst="rect">
-            <a:avLst/>
-          </a:prstGeom>
-          <a:noFill/>
-          <a:ln/>
-        </p:spPr>
-        <p:txBody>
-          <a:bodyPr wrap="square" lIns="0" tIns="0" rIns="0" bIns="0" rtlCol="0" anchor="ctr"/>
-          <a:lstStyle/>
-          <a:p>
-            <a:pPr algn="r" indent="0" marL="0">
-              <a:buNone/>
-            </a:pPr>
-            <a:r>
-              <a:rPr lang="en-US" sz="1100" dirty="0">
-                <a:solidFill>
-                  <a:srgbClr val="A8B4B8"/>
-                </a:solidFill>
-                <a:latin typeface="Meiryo" pitchFamily="34" charset="0"/>
-                <a:ea typeface="Meiryo" pitchFamily="34" charset="-122"/>
-                <a:cs typeface="Meiryo" pitchFamily="34" charset="-120"/>
-              </a:rPr>
-              <a:t>2</a:t>
-            </a:r>
-            <a:endParaRPr lang="en-US" sz="1100" dirty="0"/>
-          </a:p>
-        </p:txBody>
-      </p:sp>
       <p:pic>
         <p:nvPicPr>
-          <p:cNvPr id="5" name="Image 0" descr="/sessions/compassionate-sweet-heisenberg/mnt/dev-aspath-life-main/_wp移行素材/★引継ぎ資料/画像/Y02_投稿を追加.jpg">    </p:cNvPr>
+          <p:cNvPr id="2" name="Image 0" descr="/sessions/compassionate-sweet-heisenberg/mnt/dev-aspath-life-main/tools/assets/logo-deck.png">    </p:cNvPr>
           <p:cNvPicPr>
             <a:picLocks noChangeAspect="1"/>
           </p:cNvPicPr>
@@ -6807,6 +7250,186 @@
         </p:blipFill>
         <p:spPr>
           <a:xfrm>
+            <a:off x="11458173" y="109728"/>
+            <a:ext cx="209571" cy="256032"/>
+          </a:xfrm>
+          <a:prstGeom prst="rect">
+            <a:avLst/>
+          </a:prstGeom>
+        </p:spPr>
+      </p:pic>
+      <p:sp>
+        <p:nvSpPr>
+          <p:cNvPr id="3" name="Text 0"/>
+          <p:cNvSpPr txBox="1"/>
+          <p:nvPr/>
+        </p:nvSpPr>
+        <p:spPr>
+          <a:xfrm>
+            <a:off x="8623533" y="128016"/>
+            <a:ext cx="2743200" cy="237744"/>
+          </a:xfrm>
+          <a:prstGeom prst="rect">
+            <a:avLst/>
+          </a:prstGeom>
+          <a:noFill/>
+          <a:ln/>
+        </p:spPr>
+        <p:txBody>
+          <a:bodyPr wrap="square" lIns="0" tIns="0" rIns="0" bIns="0" rtlCol="0" anchor="ctr"/>
+          <a:lstStyle/>
+          <a:p>
+            <a:pPr algn="r" indent="0" marL="0">
+              <a:buNone/>
+            </a:pPr>
+            <a:r>
+              <a:rPr lang="en-US" sz="750" dirty="0">
+                <a:solidFill>
+                  <a:srgbClr val="97A9AF"/>
+                </a:solidFill>
+                <a:latin typeface="Meiryo" pitchFamily="34" charset="0"/>
+                <a:ea typeface="Meiryo" pitchFamily="34" charset="-122"/>
+                <a:cs typeface="Meiryo" pitchFamily="34" charset="-120"/>
+              </a:rPr>
+              <a:t>鹿児島のパーキンソン病専門トレーニングスタジオ</a:t>
+            </a:r>
+            <a:endParaRPr lang="en-US" sz="750" dirty="0"/>
+          </a:p>
+        </p:txBody>
+      </p:sp>
+      <p:sp>
+        <p:nvSpPr>
+          <p:cNvPr id="4" name="Text 1"/>
+          <p:cNvSpPr/>
+          <p:nvPr/>
+        </p:nvSpPr>
+        <p:spPr>
+          <a:xfrm>
+            <a:off x="548640" y="292608"/>
+            <a:ext cx="11064240" cy="731520"/>
+          </a:xfrm>
+          <a:prstGeom prst="rect">
+            <a:avLst/>
+          </a:prstGeom>
+          <a:noFill/>
+          <a:ln/>
+        </p:spPr>
+        <p:txBody>
+          <a:bodyPr wrap="square" lIns="0" tIns="0" rIns="0" bIns="0" rtlCol="0" anchor="ctr"/>
+          <a:lstStyle/>
+          <a:p>
+            <a:pPr indent="0" marL="0">
+              <a:buNone/>
+            </a:pPr>
+            <a:r>
+              <a:rPr lang="en-US" sz="3400" b="1" dirty="0">
+                <a:solidFill>
+                  <a:srgbClr val="264653"/>
+                </a:solidFill>
+                <a:latin typeface="Meiryo" pitchFamily="34" charset="0"/>
+                <a:ea typeface="Meiryo" pitchFamily="34" charset="-122"/>
+                <a:cs typeface="Meiryo" pitchFamily="34" charset="-120"/>
+              </a:rPr>
+              <a:t>記事を新しく書く</a:t>
+            </a:r>
+            <a:endParaRPr lang="en-US" sz="3400" dirty="0"/>
+          </a:p>
+        </p:txBody>
+      </p:sp>
+      <p:sp>
+        <p:nvSpPr>
+          <p:cNvPr id="5" name="Text 2"/>
+          <p:cNvSpPr/>
+          <p:nvPr/>
+        </p:nvSpPr>
+        <p:spPr>
+          <a:xfrm>
+            <a:off x="566928" y="1042416"/>
+            <a:ext cx="11064240" cy="365760"/>
+          </a:xfrm>
+          <a:prstGeom prst="rect">
+            <a:avLst/>
+          </a:prstGeom>
+          <a:noFill/>
+          <a:ln/>
+        </p:spPr>
+        <p:txBody>
+          <a:bodyPr wrap="square" lIns="0" tIns="0" rIns="0" bIns="0" rtlCol="0" anchor="ctr"/>
+          <a:lstStyle/>
+          <a:p>
+            <a:pPr indent="0" marL="0">
+              <a:buNone/>
+            </a:pPr>
+            <a:r>
+              <a:rPr lang="en-US" sz="1600" dirty="0">
+                <a:solidFill>
+                  <a:srgbClr val="5E7681"/>
+                </a:solidFill>
+                <a:latin typeface="Meiryo" pitchFamily="34" charset="0"/>
+                <a:ea typeface="Meiryo" pitchFamily="34" charset="-122"/>
+                <a:cs typeface="Meiryo" pitchFamily="34" charset="-120"/>
+              </a:rPr>
+              <a:t>投稿 → 投稿を追加</a:t>
+            </a:r>
+            <a:endParaRPr lang="en-US" sz="1600" dirty="0"/>
+          </a:p>
+        </p:txBody>
+      </p:sp>
+      <p:sp>
+        <p:nvSpPr>
+          <p:cNvPr id="6" name="Text 3"/>
+          <p:cNvSpPr/>
+          <p:nvPr/>
+        </p:nvSpPr>
+        <p:spPr>
+          <a:xfrm>
+            <a:off x="11338560" y="6309360"/>
+            <a:ext cx="457200" cy="274320"/>
+          </a:xfrm>
+          <a:prstGeom prst="rect">
+            <a:avLst/>
+          </a:prstGeom>
+          <a:noFill/>
+          <a:ln/>
+        </p:spPr>
+        <p:txBody>
+          <a:bodyPr wrap="square" lIns="0" tIns="0" rIns="0" bIns="0" rtlCol="0" anchor="ctr"/>
+          <a:lstStyle/>
+          <a:p>
+            <a:pPr algn="r" indent="0" marL="0">
+              <a:buNone/>
+            </a:pPr>
+            <a:r>
+              <a:rPr lang="en-US" sz="1100" dirty="0">
+                <a:solidFill>
+                  <a:srgbClr val="A8B4B8"/>
+                </a:solidFill>
+                <a:latin typeface="Meiryo" pitchFamily="34" charset="0"/>
+                <a:ea typeface="Meiryo" pitchFamily="34" charset="-122"/>
+                <a:cs typeface="Meiryo" pitchFamily="34" charset="-120"/>
+              </a:rPr>
+              <a:t>2</a:t>
+            </a:r>
+            <a:endParaRPr lang="en-US" sz="1100" dirty="0"/>
+          </a:p>
+        </p:txBody>
+      </p:sp>
+      <p:pic>
+        <p:nvPicPr>
+          <p:cNvPr id="7" name="Image 1" descr="/sessions/compassionate-sweet-heisenberg/mnt/dev-aspath-life-main/_wp移行素材/★引継ぎ資料/画像/Y02_投稿を追加.jpg">    </p:cNvPr>
+          <p:cNvPicPr>
+            <a:picLocks noChangeAspect="1"/>
+          </p:cNvPicPr>
+          <p:nvPr/>
+        </p:nvPicPr>
+        <p:blipFill>
+          <a:blip r:embed="rId2"/>
+          <a:stretch>
+            <a:fillRect/>
+          </a:stretch>
+        </p:blipFill>
+        <p:spPr>
+          <a:xfrm>
             <a:off x="640080" y="1691640"/>
             <a:ext cx="6858000" cy="3341526"/>
           </a:xfrm>
@@ -6817,7 +7440,7 @@
       </p:pic>
       <p:sp>
         <p:nvSpPr>
-          <p:cNvPr id="6" name="Shape 3"/>
+          <p:cNvPr id="8" name="Shape 4"/>
           <p:cNvSpPr/>
           <p:nvPr/>
         </p:nvSpPr>
@@ -6837,7 +7460,7 @@
       </p:sp>
       <p:sp>
         <p:nvSpPr>
-          <p:cNvPr id="7" name="Text 4"/>
+          <p:cNvPr id="9" name="Text 5"/>
           <p:cNvSpPr/>
           <p:nvPr/>
         </p:nvSpPr>
@@ -6876,7 +7499,7 @@
       </p:sp>
       <p:sp>
         <p:nvSpPr>
-          <p:cNvPr id="8" name="Text 5"/>
+          <p:cNvPr id="10" name="Text 6"/>
           <p:cNvSpPr/>
           <p:nvPr/>
         </p:nvSpPr>
@@ -6915,7 +7538,7 @@
       </p:sp>
       <p:sp>
         <p:nvSpPr>
-          <p:cNvPr id="9" name="Shape 6"/>
+          <p:cNvPr id="11" name="Shape 7"/>
           <p:cNvSpPr/>
           <p:nvPr/>
         </p:nvSpPr>
@@ -6935,7 +7558,7 @@
       </p:sp>
       <p:sp>
         <p:nvSpPr>
-          <p:cNvPr id="10" name="Text 7"/>
+          <p:cNvPr id="12" name="Text 8"/>
           <p:cNvSpPr/>
           <p:nvPr/>
         </p:nvSpPr>
@@ -6974,7 +7597,7 @@
       </p:sp>
       <p:sp>
         <p:nvSpPr>
-          <p:cNvPr id="11" name="Text 8"/>
+          <p:cNvPr id="13" name="Text 9"/>
           <p:cNvSpPr/>
           <p:nvPr/>
         </p:nvSpPr>
@@ -7013,7 +7636,7 @@
       </p:sp>
       <p:sp>
         <p:nvSpPr>
-          <p:cNvPr id="12" name="Shape 9"/>
+          <p:cNvPr id="14" name="Shape 10"/>
           <p:cNvSpPr/>
           <p:nvPr/>
         </p:nvSpPr>
@@ -7033,7 +7656,7 @@
       </p:sp>
       <p:sp>
         <p:nvSpPr>
-          <p:cNvPr id="13" name="Text 10"/>
+          <p:cNvPr id="15" name="Text 11"/>
           <p:cNvSpPr/>
           <p:nvPr/>
         </p:nvSpPr>
@@ -7072,7 +7695,7 @@
       </p:sp>
       <p:sp>
         <p:nvSpPr>
-          <p:cNvPr id="14" name="Text 11"/>
+          <p:cNvPr id="16" name="Text 12"/>
           <p:cNvSpPr/>
           <p:nvPr/>
         </p:nvSpPr>
@@ -7111,7 +7734,7 @@
       </p:sp>
       <p:sp>
         <p:nvSpPr>
-          <p:cNvPr id="15" name="Shape 12"/>
+          <p:cNvPr id="17" name="Shape 13"/>
           <p:cNvSpPr/>
           <p:nvPr/>
         </p:nvSpPr>
@@ -7131,7 +7754,7 @@
       </p:sp>
       <p:sp>
         <p:nvSpPr>
-          <p:cNvPr id="16" name="Text 13"/>
+          <p:cNvPr id="18" name="Text 14"/>
           <p:cNvSpPr/>
           <p:nvPr/>
         </p:nvSpPr>
@@ -7170,7 +7793,7 @@
       </p:sp>
       <p:sp>
         <p:nvSpPr>
-          <p:cNvPr id="17" name="Text 14"/>
+          <p:cNvPr id="19" name="Text 15"/>
           <p:cNvSpPr/>
           <p:nvPr/>
         </p:nvSpPr>
@@ -7209,7 +7832,7 @@
       </p:sp>
       <p:sp>
         <p:nvSpPr>
-          <p:cNvPr id="18" name="Shape 15"/>
+          <p:cNvPr id="20" name="Shape 16"/>
           <p:cNvSpPr/>
           <p:nvPr/>
         </p:nvSpPr>
@@ -7229,7 +7852,7 @@
       </p:sp>
       <p:sp>
         <p:nvSpPr>
-          <p:cNvPr id="19" name="Text 16"/>
+          <p:cNvPr id="21" name="Text 17"/>
           <p:cNvSpPr/>
           <p:nvPr/>
         </p:nvSpPr>
@@ -7268,7 +7891,7 @@
       </p:sp>
       <p:sp>
         <p:nvSpPr>
-          <p:cNvPr id="20" name="Text 17"/>
+          <p:cNvPr id="22" name="Text 18"/>
           <p:cNvSpPr/>
           <p:nvPr/>
         </p:nvSpPr>
@@ -7307,7 +7930,7 @@
       </p:sp>
       <p:sp>
         <p:nvSpPr>
-          <p:cNvPr id="21" name="Shape 18"/>
+          <p:cNvPr id="23" name="Shape 19"/>
           <p:cNvSpPr/>
           <p:nvPr/>
         </p:nvSpPr>
@@ -7329,7 +7952,7 @@
       </p:sp>
       <p:sp>
         <p:nvSpPr>
-          <p:cNvPr id="22" name="Text 19"/>
+          <p:cNvPr id="24" name="Text 20"/>
           <p:cNvSpPr/>
           <p:nvPr/>
         </p:nvSpPr>
@@ -7421,9 +8044,72 @@
           <a:chExt cx="0" cy="0"/>
         </a:xfrm>
       </p:grpSpPr>
-      <p:sp>
-        <p:nvSpPr>
-          <p:cNvPr id="2" name="Text 0"/>
+      <p:pic>
+        <p:nvPicPr>
+          <p:cNvPr id="2" name="Image 0" descr="/sessions/compassionate-sweet-heisenberg/mnt/dev-aspath-life-main/tools/assets/logo-deck.png">    </p:cNvPr>
+          <p:cNvPicPr>
+            <a:picLocks noChangeAspect="1"/>
+          </p:cNvPicPr>
+          <p:nvPr/>
+        </p:nvPicPr>
+        <p:blipFill>
+          <a:blip r:embed="rId1"/>
+          <a:stretch>
+            <a:fillRect/>
+          </a:stretch>
+        </p:blipFill>
+        <p:spPr>
+          <a:xfrm>
+            <a:off x="11458173" y="109728"/>
+            <a:ext cx="209571" cy="256032"/>
+          </a:xfrm>
+          <a:prstGeom prst="rect">
+            <a:avLst/>
+          </a:prstGeom>
+        </p:spPr>
+      </p:pic>
+      <p:sp>
+        <p:nvSpPr>
+          <p:cNvPr id="3" name="Text 0"/>
+          <p:cNvSpPr txBox="1"/>
+          <p:nvPr/>
+        </p:nvSpPr>
+        <p:spPr>
+          <a:xfrm>
+            <a:off x="8623533" y="128016"/>
+            <a:ext cx="2743200" cy="237744"/>
+          </a:xfrm>
+          <a:prstGeom prst="rect">
+            <a:avLst/>
+          </a:prstGeom>
+          <a:noFill/>
+          <a:ln/>
+        </p:spPr>
+        <p:txBody>
+          <a:bodyPr wrap="square" lIns="0" tIns="0" rIns="0" bIns="0" rtlCol="0" anchor="ctr"/>
+          <a:lstStyle/>
+          <a:p>
+            <a:pPr algn="r" indent="0" marL="0">
+              <a:buNone/>
+            </a:pPr>
+            <a:r>
+              <a:rPr lang="en-US" sz="750" dirty="0">
+                <a:solidFill>
+                  <a:srgbClr val="97A9AF"/>
+                </a:solidFill>
+                <a:latin typeface="Meiryo" pitchFamily="34" charset="0"/>
+                <a:ea typeface="Meiryo" pitchFamily="34" charset="-122"/>
+                <a:cs typeface="Meiryo" pitchFamily="34" charset="-120"/>
+              </a:rPr>
+              <a:t>鹿児島のパーキンソン病専門トレーニングスタジオ</a:t>
+            </a:r>
+            <a:endParaRPr lang="en-US" sz="750" dirty="0"/>
+          </a:p>
+        </p:txBody>
+      </p:sp>
+      <p:sp>
+        <p:nvSpPr>
+          <p:cNvPr id="4" name="Text 1"/>
           <p:cNvSpPr/>
           <p:nvPr/>
         </p:nvSpPr>
@@ -7462,7 +8148,7 @@
       </p:sp>
       <p:sp>
         <p:nvSpPr>
-          <p:cNvPr id="3" name="Text 1"/>
+          <p:cNvPr id="5" name="Text 2"/>
           <p:cNvSpPr/>
           <p:nvPr/>
         </p:nvSpPr>
@@ -7501,7 +8187,7 @@
       </p:sp>
       <p:sp>
         <p:nvSpPr>
-          <p:cNvPr id="4" name="Text 2"/>
+          <p:cNvPr id="6" name="Text 3"/>
           <p:cNvSpPr/>
           <p:nvPr/>
         </p:nvSpPr>
@@ -7540,7 +8226,7 @@
       </p:sp>
       <p:sp>
         <p:nvSpPr>
-          <p:cNvPr id="5" name="Shape 3"/>
+          <p:cNvPr id="7" name="Shape 4"/>
           <p:cNvSpPr/>
           <p:nvPr/>
         </p:nvSpPr>
@@ -7562,7 +8248,7 @@
       </p:sp>
       <p:sp>
         <p:nvSpPr>
-          <p:cNvPr id="6" name="Text 4"/>
+          <p:cNvPr id="8" name="Text 5"/>
           <p:cNvSpPr/>
           <p:nvPr/>
         </p:nvSpPr>
@@ -7601,7 +8287,7 @@
       </p:sp>
       <p:sp>
         <p:nvSpPr>
-          <p:cNvPr id="7" name="Text 5"/>
+          <p:cNvPr id="9" name="Text 6"/>
           <p:cNvSpPr/>
           <p:nvPr/>
         </p:nvSpPr>
@@ -7663,7 +8349,7 @@
       </p:sp>
       <p:sp>
         <p:nvSpPr>
-          <p:cNvPr id="8" name="Shape 6"/>
+          <p:cNvPr id="10" name="Shape 7"/>
           <p:cNvSpPr/>
           <p:nvPr/>
         </p:nvSpPr>
@@ -7685,7 +8371,7 @@
       </p:sp>
       <p:sp>
         <p:nvSpPr>
-          <p:cNvPr id="9" name="Text 7"/>
+          <p:cNvPr id="11" name="Text 8"/>
           <p:cNvSpPr/>
           <p:nvPr/>
         </p:nvSpPr>
@@ -7724,7 +8410,7 @@
       </p:sp>
       <p:sp>
         <p:nvSpPr>
-          <p:cNvPr id="10" name="Text 8"/>
+          <p:cNvPr id="12" name="Text 9"/>
           <p:cNvSpPr/>
           <p:nvPr/>
         </p:nvSpPr>
@@ -7786,7 +8472,7 @@
       </p:sp>
       <p:sp>
         <p:nvSpPr>
-          <p:cNvPr id="11" name="Shape 9"/>
+          <p:cNvPr id="13" name="Shape 10"/>
           <p:cNvSpPr/>
           <p:nvPr/>
         </p:nvSpPr>
@@ -7808,7 +8494,7 @@
       </p:sp>
       <p:sp>
         <p:nvSpPr>
-          <p:cNvPr id="12" name="Text 10"/>
+          <p:cNvPr id="14" name="Text 11"/>
           <p:cNvSpPr/>
           <p:nvPr/>
         </p:nvSpPr>
@@ -7850,7 +8536,7 @@
       </p:sp>
       <p:sp>
         <p:nvSpPr>
-          <p:cNvPr id="13" name="Shape 11"/>
+          <p:cNvPr id="15" name="Shape 12"/>
           <p:cNvSpPr/>
           <p:nvPr/>
         </p:nvSpPr>
@@ -7872,7 +8558,7 @@
       </p:sp>
       <p:sp>
         <p:nvSpPr>
-          <p:cNvPr id="14" name="Text 12"/>
+          <p:cNvPr id="16" name="Text 13"/>
           <p:cNvSpPr/>
           <p:nvPr/>
         </p:nvSpPr>
@@ -7941,126 +8627,9 @@
           <a:chExt cx="0" cy="0"/>
         </a:xfrm>
       </p:grpSpPr>
-      <p:sp>
-        <p:nvSpPr>
-          <p:cNvPr id="2" name="Text 0"/>
-          <p:cNvSpPr/>
-          <p:nvPr/>
-        </p:nvSpPr>
-        <p:spPr>
-          <a:xfrm>
-            <a:off x="548640" y="292608"/>
-            <a:ext cx="11064240" cy="731520"/>
-          </a:xfrm>
-          <a:prstGeom prst="rect">
-            <a:avLst/>
-          </a:prstGeom>
-          <a:noFill/>
-          <a:ln/>
-        </p:spPr>
-        <p:txBody>
-          <a:bodyPr wrap="square" lIns="0" tIns="0" rIns="0" bIns="0" rtlCol="0" anchor="ctr"/>
-          <a:lstStyle/>
-          <a:p>
-            <a:pPr indent="0" marL="0">
-              <a:buNone/>
-            </a:pPr>
-            <a:r>
-              <a:rPr lang="en-US" sz="3400" b="1" dirty="0">
-                <a:solidFill>
-                  <a:srgbClr val="264653"/>
-                </a:solidFill>
-                <a:latin typeface="Meiryo" pitchFamily="34" charset="0"/>
-                <a:ea typeface="Meiryo" pitchFamily="34" charset="-122"/>
-                <a:cs typeface="Meiryo" pitchFamily="34" charset="-120"/>
-              </a:rPr>
-              <a:t>書いた記事を後から直す</a:t>
-            </a:r>
-            <a:endParaRPr lang="en-US" sz="3400" dirty="0"/>
-          </a:p>
-        </p:txBody>
-      </p:sp>
-      <p:sp>
-        <p:nvSpPr>
-          <p:cNvPr id="3" name="Text 1"/>
-          <p:cNvSpPr/>
-          <p:nvPr/>
-        </p:nvSpPr>
-        <p:spPr>
-          <a:xfrm>
-            <a:off x="566928" y="1042416"/>
-            <a:ext cx="11064240" cy="365760"/>
-          </a:xfrm>
-          <a:prstGeom prst="rect">
-            <a:avLst/>
-          </a:prstGeom>
-          <a:noFill/>
-          <a:ln/>
-        </p:spPr>
-        <p:txBody>
-          <a:bodyPr wrap="square" lIns="0" tIns="0" rIns="0" bIns="0" rtlCol="0" anchor="ctr"/>
-          <a:lstStyle/>
-          <a:p>
-            <a:pPr indent="0" marL="0">
-              <a:buNone/>
-            </a:pPr>
-            <a:r>
-              <a:rPr lang="en-US" sz="1600" dirty="0">
-                <a:solidFill>
-                  <a:srgbClr val="5E7681"/>
-                </a:solidFill>
-                <a:latin typeface="Meiryo" pitchFamily="34" charset="0"/>
-                <a:ea typeface="Meiryo" pitchFamily="34" charset="-122"/>
-                <a:cs typeface="Meiryo" pitchFamily="34" charset="-120"/>
-              </a:rPr>
-              <a:t>公開した記事も、何度でも直せます</a:t>
-            </a:r>
-            <a:endParaRPr lang="en-US" sz="1600" dirty="0"/>
-          </a:p>
-        </p:txBody>
-      </p:sp>
-      <p:sp>
-        <p:nvSpPr>
-          <p:cNvPr id="4" name="Text 2"/>
-          <p:cNvSpPr/>
-          <p:nvPr/>
-        </p:nvSpPr>
-        <p:spPr>
-          <a:xfrm>
-            <a:off x="11338560" y="6309360"/>
-            <a:ext cx="457200" cy="274320"/>
-          </a:xfrm>
-          <a:prstGeom prst="rect">
-            <a:avLst/>
-          </a:prstGeom>
-          <a:noFill/>
-          <a:ln/>
-        </p:spPr>
-        <p:txBody>
-          <a:bodyPr wrap="square" lIns="0" tIns="0" rIns="0" bIns="0" rtlCol="0" anchor="ctr"/>
-          <a:lstStyle/>
-          <a:p>
-            <a:pPr algn="r" indent="0" marL="0">
-              <a:buNone/>
-            </a:pPr>
-            <a:r>
-              <a:rPr lang="en-US" sz="1100" dirty="0">
-                <a:solidFill>
-                  <a:srgbClr val="A8B4B8"/>
-                </a:solidFill>
-                <a:latin typeface="Meiryo" pitchFamily="34" charset="0"/>
-                <a:ea typeface="Meiryo" pitchFamily="34" charset="-122"/>
-                <a:cs typeface="Meiryo" pitchFamily="34" charset="-120"/>
-              </a:rPr>
-              <a:t>4</a:t>
-            </a:r>
-            <a:endParaRPr lang="en-US" sz="1100" dirty="0"/>
-          </a:p>
-        </p:txBody>
-      </p:sp>
       <p:pic>
         <p:nvPicPr>
-          <p:cNvPr id="5" name="Image 0" descr="/sessions/compassionate-sweet-heisenberg/mnt/dev-aspath-life-main/_wp移行素材/★引継ぎ資料/画像/Y01_投稿一覧.jpg">    </p:cNvPr>
+          <p:cNvPr id="2" name="Image 0" descr="/sessions/compassionate-sweet-heisenberg/mnt/dev-aspath-life-main/tools/assets/logo-deck.png">    </p:cNvPr>
           <p:cNvPicPr>
             <a:picLocks noChangeAspect="1"/>
           </p:cNvPicPr>
@@ -8074,6 +8643,186 @@
         </p:blipFill>
         <p:spPr>
           <a:xfrm>
+            <a:off x="11458173" y="109728"/>
+            <a:ext cx="209571" cy="256032"/>
+          </a:xfrm>
+          <a:prstGeom prst="rect">
+            <a:avLst/>
+          </a:prstGeom>
+        </p:spPr>
+      </p:pic>
+      <p:sp>
+        <p:nvSpPr>
+          <p:cNvPr id="3" name="Text 0"/>
+          <p:cNvSpPr txBox="1"/>
+          <p:nvPr/>
+        </p:nvSpPr>
+        <p:spPr>
+          <a:xfrm>
+            <a:off x="8623533" y="128016"/>
+            <a:ext cx="2743200" cy="237744"/>
+          </a:xfrm>
+          <a:prstGeom prst="rect">
+            <a:avLst/>
+          </a:prstGeom>
+          <a:noFill/>
+          <a:ln/>
+        </p:spPr>
+        <p:txBody>
+          <a:bodyPr wrap="square" lIns="0" tIns="0" rIns="0" bIns="0" rtlCol="0" anchor="ctr"/>
+          <a:lstStyle/>
+          <a:p>
+            <a:pPr algn="r" indent="0" marL="0">
+              <a:buNone/>
+            </a:pPr>
+            <a:r>
+              <a:rPr lang="en-US" sz="750" dirty="0">
+                <a:solidFill>
+                  <a:srgbClr val="97A9AF"/>
+                </a:solidFill>
+                <a:latin typeface="Meiryo" pitchFamily="34" charset="0"/>
+                <a:ea typeface="Meiryo" pitchFamily="34" charset="-122"/>
+                <a:cs typeface="Meiryo" pitchFamily="34" charset="-120"/>
+              </a:rPr>
+              <a:t>鹿児島のパーキンソン病専門トレーニングスタジオ</a:t>
+            </a:r>
+            <a:endParaRPr lang="en-US" sz="750" dirty="0"/>
+          </a:p>
+        </p:txBody>
+      </p:sp>
+      <p:sp>
+        <p:nvSpPr>
+          <p:cNvPr id="4" name="Text 1"/>
+          <p:cNvSpPr/>
+          <p:nvPr/>
+        </p:nvSpPr>
+        <p:spPr>
+          <a:xfrm>
+            <a:off x="548640" y="292608"/>
+            <a:ext cx="11064240" cy="731520"/>
+          </a:xfrm>
+          <a:prstGeom prst="rect">
+            <a:avLst/>
+          </a:prstGeom>
+          <a:noFill/>
+          <a:ln/>
+        </p:spPr>
+        <p:txBody>
+          <a:bodyPr wrap="square" lIns="0" tIns="0" rIns="0" bIns="0" rtlCol="0" anchor="ctr"/>
+          <a:lstStyle/>
+          <a:p>
+            <a:pPr indent="0" marL="0">
+              <a:buNone/>
+            </a:pPr>
+            <a:r>
+              <a:rPr lang="en-US" sz="3400" b="1" dirty="0">
+                <a:solidFill>
+                  <a:srgbClr val="264653"/>
+                </a:solidFill>
+                <a:latin typeface="Meiryo" pitchFamily="34" charset="0"/>
+                <a:ea typeface="Meiryo" pitchFamily="34" charset="-122"/>
+                <a:cs typeface="Meiryo" pitchFamily="34" charset="-120"/>
+              </a:rPr>
+              <a:t>書いた記事を後から直す</a:t>
+            </a:r>
+            <a:endParaRPr lang="en-US" sz="3400" dirty="0"/>
+          </a:p>
+        </p:txBody>
+      </p:sp>
+      <p:sp>
+        <p:nvSpPr>
+          <p:cNvPr id="5" name="Text 2"/>
+          <p:cNvSpPr/>
+          <p:nvPr/>
+        </p:nvSpPr>
+        <p:spPr>
+          <a:xfrm>
+            <a:off x="566928" y="1042416"/>
+            <a:ext cx="11064240" cy="365760"/>
+          </a:xfrm>
+          <a:prstGeom prst="rect">
+            <a:avLst/>
+          </a:prstGeom>
+          <a:noFill/>
+          <a:ln/>
+        </p:spPr>
+        <p:txBody>
+          <a:bodyPr wrap="square" lIns="0" tIns="0" rIns="0" bIns="0" rtlCol="0" anchor="ctr"/>
+          <a:lstStyle/>
+          <a:p>
+            <a:pPr indent="0" marL="0">
+              <a:buNone/>
+            </a:pPr>
+            <a:r>
+              <a:rPr lang="en-US" sz="1600" dirty="0">
+                <a:solidFill>
+                  <a:srgbClr val="5E7681"/>
+                </a:solidFill>
+                <a:latin typeface="Meiryo" pitchFamily="34" charset="0"/>
+                <a:ea typeface="Meiryo" pitchFamily="34" charset="-122"/>
+                <a:cs typeface="Meiryo" pitchFamily="34" charset="-120"/>
+              </a:rPr>
+              <a:t>公開した記事も、何度でも直せます</a:t>
+            </a:r>
+            <a:endParaRPr lang="en-US" sz="1600" dirty="0"/>
+          </a:p>
+        </p:txBody>
+      </p:sp>
+      <p:sp>
+        <p:nvSpPr>
+          <p:cNvPr id="6" name="Text 3"/>
+          <p:cNvSpPr/>
+          <p:nvPr/>
+        </p:nvSpPr>
+        <p:spPr>
+          <a:xfrm>
+            <a:off x="11338560" y="6309360"/>
+            <a:ext cx="457200" cy="274320"/>
+          </a:xfrm>
+          <a:prstGeom prst="rect">
+            <a:avLst/>
+          </a:prstGeom>
+          <a:noFill/>
+          <a:ln/>
+        </p:spPr>
+        <p:txBody>
+          <a:bodyPr wrap="square" lIns="0" tIns="0" rIns="0" bIns="0" rtlCol="0" anchor="ctr"/>
+          <a:lstStyle/>
+          <a:p>
+            <a:pPr algn="r" indent="0" marL="0">
+              <a:buNone/>
+            </a:pPr>
+            <a:r>
+              <a:rPr lang="en-US" sz="1100" dirty="0">
+                <a:solidFill>
+                  <a:srgbClr val="A8B4B8"/>
+                </a:solidFill>
+                <a:latin typeface="Meiryo" pitchFamily="34" charset="0"/>
+                <a:ea typeface="Meiryo" pitchFamily="34" charset="-122"/>
+                <a:cs typeface="Meiryo" pitchFamily="34" charset="-120"/>
+              </a:rPr>
+              <a:t>4</a:t>
+            </a:r>
+            <a:endParaRPr lang="en-US" sz="1100" dirty="0"/>
+          </a:p>
+        </p:txBody>
+      </p:sp>
+      <p:pic>
+        <p:nvPicPr>
+          <p:cNvPr id="7" name="Image 1" descr="/sessions/compassionate-sweet-heisenberg/mnt/dev-aspath-life-main/_wp移行素材/★引継ぎ資料/画像/Y01_投稿一覧.jpg">    </p:cNvPr>
+          <p:cNvPicPr>
+            <a:picLocks noChangeAspect="1"/>
+          </p:cNvPicPr>
+          <p:nvPr/>
+        </p:nvPicPr>
+        <p:blipFill>
+          <a:blip r:embed="rId2"/>
+          <a:stretch>
+            <a:fillRect/>
+          </a:stretch>
+        </p:blipFill>
+        <p:spPr>
+          <a:xfrm>
             <a:off x="640080" y="1691640"/>
             <a:ext cx="6858000" cy="3341526"/>
           </a:xfrm>
@@ -8084,7 +8833,7 @@
       </p:pic>
       <p:sp>
         <p:nvSpPr>
-          <p:cNvPr id="6" name="Shape 3"/>
+          <p:cNvPr id="8" name="Shape 4"/>
           <p:cNvSpPr/>
           <p:nvPr/>
         </p:nvSpPr>
@@ -8104,7 +8853,7 @@
       </p:sp>
       <p:sp>
         <p:nvSpPr>
-          <p:cNvPr id="7" name="Text 4"/>
+          <p:cNvPr id="9" name="Text 5"/>
           <p:cNvSpPr/>
           <p:nvPr/>
         </p:nvSpPr>
@@ -8143,7 +8892,7 @@
       </p:sp>
       <p:sp>
         <p:nvSpPr>
-          <p:cNvPr id="8" name="Text 5"/>
+          <p:cNvPr id="10" name="Text 6"/>
           <p:cNvSpPr/>
           <p:nvPr/>
         </p:nvSpPr>
@@ -8182,7 +8931,7 @@
       </p:sp>
       <p:sp>
         <p:nvSpPr>
-          <p:cNvPr id="9" name="Shape 6"/>
+          <p:cNvPr id="11" name="Shape 7"/>
           <p:cNvSpPr/>
           <p:nvPr/>
         </p:nvSpPr>
@@ -8202,7 +8951,7 @@
       </p:sp>
       <p:sp>
         <p:nvSpPr>
-          <p:cNvPr id="10" name="Text 7"/>
+          <p:cNvPr id="12" name="Text 8"/>
           <p:cNvSpPr/>
           <p:nvPr/>
         </p:nvSpPr>
@@ -8241,7 +8990,7 @@
       </p:sp>
       <p:sp>
         <p:nvSpPr>
-          <p:cNvPr id="11" name="Text 8"/>
+          <p:cNvPr id="13" name="Text 9"/>
           <p:cNvSpPr/>
           <p:nvPr/>
         </p:nvSpPr>
@@ -8280,7 +9029,7 @@
       </p:sp>
       <p:sp>
         <p:nvSpPr>
-          <p:cNvPr id="12" name="Shape 9"/>
+          <p:cNvPr id="14" name="Shape 10"/>
           <p:cNvSpPr/>
           <p:nvPr/>
         </p:nvSpPr>
@@ -8300,7 +9049,7 @@
       </p:sp>
       <p:sp>
         <p:nvSpPr>
-          <p:cNvPr id="13" name="Text 10"/>
+          <p:cNvPr id="15" name="Text 11"/>
           <p:cNvSpPr/>
           <p:nvPr/>
         </p:nvSpPr>
@@ -8339,7 +9088,7 @@
       </p:sp>
       <p:sp>
         <p:nvSpPr>
-          <p:cNvPr id="14" name="Text 11"/>
+          <p:cNvPr id="16" name="Text 12"/>
           <p:cNvSpPr/>
           <p:nvPr/>
         </p:nvSpPr>
@@ -8378,7 +9127,7 @@
       </p:sp>
       <p:sp>
         <p:nvSpPr>
-          <p:cNvPr id="15" name="Text 12"/>
+          <p:cNvPr id="17" name="Text 13"/>
           <p:cNvSpPr/>
           <p:nvPr/>
         </p:nvSpPr>
@@ -8417,7 +9166,7 @@
       </p:sp>
       <p:sp>
         <p:nvSpPr>
-          <p:cNvPr id="16" name="Text 13"/>
+          <p:cNvPr id="18" name="Text 14"/>
           <p:cNvSpPr/>
           <p:nvPr/>
         </p:nvSpPr>
@@ -8532,126 +9281,9 @@
           <a:chExt cx="0" cy="0"/>
         </a:xfrm>
       </p:grpSpPr>
-      <p:sp>
-        <p:nvSpPr>
-          <p:cNvPr id="2" name="Text 0"/>
-          <p:cNvSpPr/>
-          <p:nvPr/>
-        </p:nvSpPr>
-        <p:spPr>
-          <a:xfrm>
-            <a:off x="548640" y="292608"/>
-            <a:ext cx="11064240" cy="731520"/>
-          </a:xfrm>
-          <a:prstGeom prst="rect">
-            <a:avLst/>
-          </a:prstGeom>
-          <a:noFill/>
-          <a:ln/>
-        </p:spPr>
-        <p:txBody>
-          <a:bodyPr wrap="square" lIns="0" tIns="0" rIns="0" bIns="0" rtlCol="0" anchor="ctr"/>
-          <a:lstStyle/>
-          <a:p>
-            <a:pPr indent="0" marL="0">
-              <a:buNone/>
-            </a:pPr>
-            <a:r>
-              <a:rPr lang="en-US" sz="3400" b="1" dirty="0">
-                <a:solidFill>
-                  <a:srgbClr val="264653"/>
-                </a:solidFill>
-                <a:latin typeface="Meiryo" pitchFamily="34" charset="0"/>
-                <a:ea typeface="Meiryo" pitchFamily="34" charset="-122"/>
-                <a:cs typeface="Meiryo" pitchFamily="34" charset="-120"/>
-              </a:rPr>
-              <a:t>編集画面はこう見えていれば正常です</a:t>
-            </a:r>
-            <a:endParaRPr lang="en-US" sz="3400" dirty="0"/>
-          </a:p>
-        </p:txBody>
-      </p:sp>
-      <p:sp>
-        <p:nvSpPr>
-          <p:cNvPr id="3" name="Text 1"/>
-          <p:cNvSpPr/>
-          <p:nvPr/>
-        </p:nvSpPr>
-        <p:spPr>
-          <a:xfrm>
-            <a:off x="566928" y="1042416"/>
-            <a:ext cx="11064240" cy="365760"/>
-          </a:xfrm>
-          <a:prstGeom prst="rect">
-            <a:avLst/>
-          </a:prstGeom>
-          <a:noFill/>
-          <a:ln/>
-        </p:spPr>
-        <p:txBody>
-          <a:bodyPr wrap="square" lIns="0" tIns="0" rIns="0" bIns="0" rtlCol="0" anchor="ctr"/>
-          <a:lstStyle/>
-          <a:p>
-            <a:pPr indent="0" marL="0">
-              <a:buNone/>
-            </a:pPr>
-            <a:r>
-              <a:rPr lang="en-US" sz="1600" dirty="0">
-                <a:solidFill>
-                  <a:srgbClr val="5E7681"/>
-                </a:solidFill>
-                <a:latin typeface="Meiryo" pitchFamily="34" charset="0"/>
-                <a:ea typeface="Meiryo" pitchFamily="34" charset="-122"/>
-                <a:cs typeface="Meiryo" pitchFamily="34" charset="-120"/>
-              </a:rPr>
-              <a:t>文章がそのまま読める状態が正しい画面です</a:t>
-            </a:r>
-            <a:endParaRPr lang="en-US" sz="1600" dirty="0"/>
-          </a:p>
-        </p:txBody>
-      </p:sp>
-      <p:sp>
-        <p:nvSpPr>
-          <p:cNvPr id="4" name="Text 2"/>
-          <p:cNvSpPr/>
-          <p:nvPr/>
-        </p:nvSpPr>
-        <p:spPr>
-          <a:xfrm>
-            <a:off x="11338560" y="6309360"/>
-            <a:ext cx="457200" cy="274320"/>
-          </a:xfrm>
-          <a:prstGeom prst="rect">
-            <a:avLst/>
-          </a:prstGeom>
-          <a:noFill/>
-          <a:ln/>
-        </p:spPr>
-        <p:txBody>
-          <a:bodyPr wrap="square" lIns="0" tIns="0" rIns="0" bIns="0" rtlCol="0" anchor="ctr"/>
-          <a:lstStyle/>
-          <a:p>
-            <a:pPr algn="r" indent="0" marL="0">
-              <a:buNone/>
-            </a:pPr>
-            <a:r>
-              <a:rPr lang="en-US" sz="1100" dirty="0">
-                <a:solidFill>
-                  <a:srgbClr val="A8B4B8"/>
-                </a:solidFill>
-                <a:latin typeface="Meiryo" pitchFamily="34" charset="0"/>
-                <a:ea typeface="Meiryo" pitchFamily="34" charset="-122"/>
-                <a:cs typeface="Meiryo" pitchFamily="34" charset="-120"/>
-              </a:rPr>
-              <a:t>5</a:t>
-            </a:r>
-            <a:endParaRPr lang="en-US" sz="1100" dirty="0"/>
-          </a:p>
-        </p:txBody>
-      </p:sp>
       <p:pic>
         <p:nvPicPr>
-          <p:cNvPr id="5" name="Image 0" descr="/sessions/compassionate-sweet-heisenberg/mnt/dev-aspath-life-main/_wp移行素材/★引継ぎ資料/画像/Y03_記事を編集.jpg">    </p:cNvPr>
+          <p:cNvPr id="2" name="Image 0" descr="/sessions/compassionate-sweet-heisenberg/mnt/dev-aspath-life-main/tools/assets/logo-deck.png">    </p:cNvPr>
           <p:cNvPicPr>
             <a:picLocks noChangeAspect="1"/>
           </p:cNvPicPr>
@@ -8665,6 +9297,186 @@
         </p:blipFill>
         <p:spPr>
           <a:xfrm>
+            <a:off x="11458173" y="109728"/>
+            <a:ext cx="209571" cy="256032"/>
+          </a:xfrm>
+          <a:prstGeom prst="rect">
+            <a:avLst/>
+          </a:prstGeom>
+        </p:spPr>
+      </p:pic>
+      <p:sp>
+        <p:nvSpPr>
+          <p:cNvPr id="3" name="Text 0"/>
+          <p:cNvSpPr txBox="1"/>
+          <p:nvPr/>
+        </p:nvSpPr>
+        <p:spPr>
+          <a:xfrm>
+            <a:off x="8623533" y="128016"/>
+            <a:ext cx="2743200" cy="237744"/>
+          </a:xfrm>
+          <a:prstGeom prst="rect">
+            <a:avLst/>
+          </a:prstGeom>
+          <a:noFill/>
+          <a:ln/>
+        </p:spPr>
+        <p:txBody>
+          <a:bodyPr wrap="square" lIns="0" tIns="0" rIns="0" bIns="0" rtlCol="0" anchor="ctr"/>
+          <a:lstStyle/>
+          <a:p>
+            <a:pPr algn="r" indent="0" marL="0">
+              <a:buNone/>
+            </a:pPr>
+            <a:r>
+              <a:rPr lang="en-US" sz="750" dirty="0">
+                <a:solidFill>
+                  <a:srgbClr val="97A9AF"/>
+                </a:solidFill>
+                <a:latin typeface="Meiryo" pitchFamily="34" charset="0"/>
+                <a:ea typeface="Meiryo" pitchFamily="34" charset="-122"/>
+                <a:cs typeface="Meiryo" pitchFamily="34" charset="-120"/>
+              </a:rPr>
+              <a:t>鹿児島のパーキンソン病専門トレーニングスタジオ</a:t>
+            </a:r>
+            <a:endParaRPr lang="en-US" sz="750" dirty="0"/>
+          </a:p>
+        </p:txBody>
+      </p:sp>
+      <p:sp>
+        <p:nvSpPr>
+          <p:cNvPr id="4" name="Text 1"/>
+          <p:cNvSpPr/>
+          <p:nvPr/>
+        </p:nvSpPr>
+        <p:spPr>
+          <a:xfrm>
+            <a:off x="548640" y="292608"/>
+            <a:ext cx="11064240" cy="731520"/>
+          </a:xfrm>
+          <a:prstGeom prst="rect">
+            <a:avLst/>
+          </a:prstGeom>
+          <a:noFill/>
+          <a:ln/>
+        </p:spPr>
+        <p:txBody>
+          <a:bodyPr wrap="square" lIns="0" tIns="0" rIns="0" bIns="0" rtlCol="0" anchor="ctr"/>
+          <a:lstStyle/>
+          <a:p>
+            <a:pPr indent="0" marL="0">
+              <a:buNone/>
+            </a:pPr>
+            <a:r>
+              <a:rPr lang="en-US" sz="3400" b="1" dirty="0">
+                <a:solidFill>
+                  <a:srgbClr val="264653"/>
+                </a:solidFill>
+                <a:latin typeface="Meiryo" pitchFamily="34" charset="0"/>
+                <a:ea typeface="Meiryo" pitchFamily="34" charset="-122"/>
+                <a:cs typeface="Meiryo" pitchFamily="34" charset="-120"/>
+              </a:rPr>
+              <a:t>編集画面はこう見えていれば正常です</a:t>
+            </a:r>
+            <a:endParaRPr lang="en-US" sz="3400" dirty="0"/>
+          </a:p>
+        </p:txBody>
+      </p:sp>
+      <p:sp>
+        <p:nvSpPr>
+          <p:cNvPr id="5" name="Text 2"/>
+          <p:cNvSpPr/>
+          <p:nvPr/>
+        </p:nvSpPr>
+        <p:spPr>
+          <a:xfrm>
+            <a:off x="566928" y="1042416"/>
+            <a:ext cx="11064240" cy="365760"/>
+          </a:xfrm>
+          <a:prstGeom prst="rect">
+            <a:avLst/>
+          </a:prstGeom>
+          <a:noFill/>
+          <a:ln/>
+        </p:spPr>
+        <p:txBody>
+          <a:bodyPr wrap="square" lIns="0" tIns="0" rIns="0" bIns="0" rtlCol="0" anchor="ctr"/>
+          <a:lstStyle/>
+          <a:p>
+            <a:pPr indent="0" marL="0">
+              <a:buNone/>
+            </a:pPr>
+            <a:r>
+              <a:rPr lang="en-US" sz="1600" dirty="0">
+                <a:solidFill>
+                  <a:srgbClr val="5E7681"/>
+                </a:solidFill>
+                <a:latin typeface="Meiryo" pitchFamily="34" charset="0"/>
+                <a:ea typeface="Meiryo" pitchFamily="34" charset="-122"/>
+                <a:cs typeface="Meiryo" pitchFamily="34" charset="-120"/>
+              </a:rPr>
+              <a:t>文章がそのまま読める状態が正しい画面です</a:t>
+            </a:r>
+            <a:endParaRPr lang="en-US" sz="1600" dirty="0"/>
+          </a:p>
+        </p:txBody>
+      </p:sp>
+      <p:sp>
+        <p:nvSpPr>
+          <p:cNvPr id="6" name="Text 3"/>
+          <p:cNvSpPr/>
+          <p:nvPr/>
+        </p:nvSpPr>
+        <p:spPr>
+          <a:xfrm>
+            <a:off x="11338560" y="6309360"/>
+            <a:ext cx="457200" cy="274320"/>
+          </a:xfrm>
+          <a:prstGeom prst="rect">
+            <a:avLst/>
+          </a:prstGeom>
+          <a:noFill/>
+          <a:ln/>
+        </p:spPr>
+        <p:txBody>
+          <a:bodyPr wrap="square" lIns="0" tIns="0" rIns="0" bIns="0" rtlCol="0" anchor="ctr"/>
+          <a:lstStyle/>
+          <a:p>
+            <a:pPr algn="r" indent="0" marL="0">
+              <a:buNone/>
+            </a:pPr>
+            <a:r>
+              <a:rPr lang="en-US" sz="1100" dirty="0">
+                <a:solidFill>
+                  <a:srgbClr val="A8B4B8"/>
+                </a:solidFill>
+                <a:latin typeface="Meiryo" pitchFamily="34" charset="0"/>
+                <a:ea typeface="Meiryo" pitchFamily="34" charset="-122"/>
+                <a:cs typeface="Meiryo" pitchFamily="34" charset="-120"/>
+              </a:rPr>
+              <a:t>5</a:t>
+            </a:r>
+            <a:endParaRPr lang="en-US" sz="1100" dirty="0"/>
+          </a:p>
+        </p:txBody>
+      </p:sp>
+      <p:pic>
+        <p:nvPicPr>
+          <p:cNvPr id="7" name="Image 1" descr="/sessions/compassionate-sweet-heisenberg/mnt/dev-aspath-life-main/_wp移行素材/★引継ぎ資料/画像/Y03_記事を編集.jpg">    </p:cNvPr>
+          <p:cNvPicPr>
+            <a:picLocks noChangeAspect="1"/>
+          </p:cNvPicPr>
+          <p:nvPr/>
+        </p:nvPicPr>
+        <p:blipFill>
+          <a:blip r:embed="rId2"/>
+          <a:stretch>
+            <a:fillRect/>
+          </a:stretch>
+        </p:blipFill>
+        <p:spPr>
+          <a:xfrm>
             <a:off x="1463040" y="1737360"/>
             <a:ext cx="9235440" cy="4499921"/>
           </a:xfrm>
@@ -8675,7 +9487,7 @@
       </p:pic>
       <p:sp>
         <p:nvSpPr>
-          <p:cNvPr id="6" name="Shape 3"/>
+          <p:cNvPr id="8" name="Shape 4"/>
           <p:cNvSpPr/>
           <p:nvPr/>
         </p:nvSpPr>
@@ -8697,7 +9509,7 @@
       </p:sp>
       <p:sp>
         <p:nvSpPr>
-          <p:cNvPr id="7" name="Text 4"/>
+          <p:cNvPr id="9" name="Text 5"/>
           <p:cNvSpPr/>
           <p:nvPr/>
         </p:nvSpPr>
@@ -8769,126 +9581,9 @@
           <a:chExt cx="0" cy="0"/>
         </a:xfrm>
       </p:grpSpPr>
-      <p:sp>
-        <p:nvSpPr>
-          <p:cNvPr id="2" name="Text 0"/>
-          <p:cNvSpPr/>
-          <p:nvPr/>
-        </p:nvSpPr>
-        <p:spPr>
-          <a:xfrm>
-            <a:off x="548640" y="292608"/>
-            <a:ext cx="11064240" cy="731520"/>
-          </a:xfrm>
-          <a:prstGeom prst="rect">
-            <a:avLst/>
-          </a:prstGeom>
-          <a:noFill/>
-          <a:ln/>
-        </p:spPr>
-        <p:txBody>
-          <a:bodyPr wrap="square" lIns="0" tIns="0" rIns="0" bIns="0" rtlCol="0" anchor="ctr"/>
-          <a:lstStyle/>
-          <a:p>
-            <a:pPr indent="0" marL="0">
-              <a:buNone/>
-            </a:pPr>
-            <a:r>
-              <a:rPr lang="en-US" sz="3400" b="1" dirty="0">
-                <a:solidFill>
-                  <a:srgbClr val="264653"/>
-                </a:solidFill>
-                <a:latin typeface="Meiryo" pitchFamily="34" charset="0"/>
-                <a:ea typeface="Meiryo" pitchFamily="34" charset="-122"/>
-                <a:cs typeface="Meiryo" pitchFamily="34" charset="-120"/>
-              </a:rPr>
-              <a:t>記号だらけの画面になったら</a:t>
-            </a:r>
-            <a:endParaRPr lang="en-US" sz="3400" dirty="0"/>
-          </a:p>
-        </p:txBody>
-      </p:sp>
-      <p:sp>
-        <p:nvSpPr>
-          <p:cNvPr id="3" name="Text 1"/>
-          <p:cNvSpPr/>
-          <p:nvPr/>
-        </p:nvSpPr>
-        <p:spPr>
-          <a:xfrm>
-            <a:off x="566928" y="1042416"/>
-            <a:ext cx="11064240" cy="365760"/>
-          </a:xfrm>
-          <a:prstGeom prst="rect">
-            <a:avLst/>
-          </a:prstGeom>
-          <a:noFill/>
-          <a:ln/>
-        </p:spPr>
-        <p:txBody>
-          <a:bodyPr wrap="square" lIns="0" tIns="0" rIns="0" bIns="0" rtlCol="0" anchor="ctr"/>
-          <a:lstStyle/>
-          <a:p>
-            <a:pPr indent="0" marL="0">
-              <a:buNone/>
-            </a:pPr>
-            <a:r>
-              <a:rPr lang="en-US" sz="1600" dirty="0">
-                <a:solidFill>
-                  <a:srgbClr val="5E7681"/>
-                </a:solidFill>
-                <a:latin typeface="Meiryo" pitchFamily="34" charset="0"/>
-                <a:ea typeface="Meiryo" pitchFamily="34" charset="-122"/>
-                <a:cs typeface="Meiryo" pitchFamily="34" charset="-120"/>
-              </a:rPr>
-              <a:t>押すだけで直ります。ご安心ください</a:t>
-            </a:r>
-            <a:endParaRPr lang="en-US" sz="1600" dirty="0"/>
-          </a:p>
-        </p:txBody>
-      </p:sp>
-      <p:sp>
-        <p:nvSpPr>
-          <p:cNvPr id="4" name="Text 2"/>
-          <p:cNvSpPr/>
-          <p:nvPr/>
-        </p:nvSpPr>
-        <p:spPr>
-          <a:xfrm>
-            <a:off x="11338560" y="6309360"/>
-            <a:ext cx="457200" cy="274320"/>
-          </a:xfrm>
-          <a:prstGeom prst="rect">
-            <a:avLst/>
-          </a:prstGeom>
-          <a:noFill/>
-          <a:ln/>
-        </p:spPr>
-        <p:txBody>
-          <a:bodyPr wrap="square" lIns="0" tIns="0" rIns="0" bIns="0" rtlCol="0" anchor="ctr"/>
-          <a:lstStyle/>
-          <a:p>
-            <a:pPr algn="r" indent="0" marL="0">
-              <a:buNone/>
-            </a:pPr>
-            <a:r>
-              <a:rPr lang="en-US" sz="1100" dirty="0">
-                <a:solidFill>
-                  <a:srgbClr val="A8B4B8"/>
-                </a:solidFill>
-                <a:latin typeface="Meiryo" pitchFamily="34" charset="0"/>
-                <a:ea typeface="Meiryo" pitchFamily="34" charset="-122"/>
-                <a:cs typeface="Meiryo" pitchFamily="34" charset="-120"/>
-              </a:rPr>
-              <a:t>6</a:t>
-            </a:r>
-            <a:endParaRPr lang="en-US" sz="1100" dirty="0"/>
-          </a:p>
-        </p:txBody>
-      </p:sp>
       <p:pic>
         <p:nvPicPr>
-          <p:cNvPr id="5" name="Image 0" descr="/sessions/compassionate-sweet-heisenberg/mnt/dev-aspath-life-main/_wp移行素材/★引継ぎ資料/画像/Y04_コードエディターの注意.jpg">    </p:cNvPr>
+          <p:cNvPr id="2" name="Image 0" descr="/sessions/compassionate-sweet-heisenberg/mnt/dev-aspath-life-main/tools/assets/logo-deck.png">    </p:cNvPr>
           <p:cNvPicPr>
             <a:picLocks noChangeAspect="1"/>
           </p:cNvPicPr>
@@ -8902,6 +9597,186 @@
         </p:blipFill>
         <p:spPr>
           <a:xfrm>
+            <a:off x="11458173" y="109728"/>
+            <a:ext cx="209571" cy="256032"/>
+          </a:xfrm>
+          <a:prstGeom prst="rect">
+            <a:avLst/>
+          </a:prstGeom>
+        </p:spPr>
+      </p:pic>
+      <p:sp>
+        <p:nvSpPr>
+          <p:cNvPr id="3" name="Text 0"/>
+          <p:cNvSpPr txBox="1"/>
+          <p:nvPr/>
+        </p:nvSpPr>
+        <p:spPr>
+          <a:xfrm>
+            <a:off x="8623533" y="128016"/>
+            <a:ext cx="2743200" cy="237744"/>
+          </a:xfrm>
+          <a:prstGeom prst="rect">
+            <a:avLst/>
+          </a:prstGeom>
+          <a:noFill/>
+          <a:ln/>
+        </p:spPr>
+        <p:txBody>
+          <a:bodyPr wrap="square" lIns="0" tIns="0" rIns="0" bIns="0" rtlCol="0" anchor="ctr"/>
+          <a:lstStyle/>
+          <a:p>
+            <a:pPr algn="r" indent="0" marL="0">
+              <a:buNone/>
+            </a:pPr>
+            <a:r>
+              <a:rPr lang="en-US" sz="750" dirty="0">
+                <a:solidFill>
+                  <a:srgbClr val="97A9AF"/>
+                </a:solidFill>
+                <a:latin typeface="Meiryo" pitchFamily="34" charset="0"/>
+                <a:ea typeface="Meiryo" pitchFamily="34" charset="-122"/>
+                <a:cs typeface="Meiryo" pitchFamily="34" charset="-120"/>
+              </a:rPr>
+              <a:t>鹿児島のパーキンソン病専門トレーニングスタジオ</a:t>
+            </a:r>
+            <a:endParaRPr lang="en-US" sz="750" dirty="0"/>
+          </a:p>
+        </p:txBody>
+      </p:sp>
+      <p:sp>
+        <p:nvSpPr>
+          <p:cNvPr id="4" name="Text 1"/>
+          <p:cNvSpPr/>
+          <p:nvPr/>
+        </p:nvSpPr>
+        <p:spPr>
+          <a:xfrm>
+            <a:off x="548640" y="292608"/>
+            <a:ext cx="11064240" cy="731520"/>
+          </a:xfrm>
+          <a:prstGeom prst="rect">
+            <a:avLst/>
+          </a:prstGeom>
+          <a:noFill/>
+          <a:ln/>
+        </p:spPr>
+        <p:txBody>
+          <a:bodyPr wrap="square" lIns="0" tIns="0" rIns="0" bIns="0" rtlCol="0" anchor="ctr"/>
+          <a:lstStyle/>
+          <a:p>
+            <a:pPr indent="0" marL="0">
+              <a:buNone/>
+            </a:pPr>
+            <a:r>
+              <a:rPr lang="en-US" sz="3400" b="1" dirty="0">
+                <a:solidFill>
+                  <a:srgbClr val="264653"/>
+                </a:solidFill>
+                <a:latin typeface="Meiryo" pitchFamily="34" charset="0"/>
+                <a:ea typeface="Meiryo" pitchFamily="34" charset="-122"/>
+                <a:cs typeface="Meiryo" pitchFamily="34" charset="-120"/>
+              </a:rPr>
+              <a:t>記号だらけの画面になったら</a:t>
+            </a:r>
+            <a:endParaRPr lang="en-US" sz="3400" dirty="0"/>
+          </a:p>
+        </p:txBody>
+      </p:sp>
+      <p:sp>
+        <p:nvSpPr>
+          <p:cNvPr id="5" name="Text 2"/>
+          <p:cNvSpPr/>
+          <p:nvPr/>
+        </p:nvSpPr>
+        <p:spPr>
+          <a:xfrm>
+            <a:off x="566928" y="1042416"/>
+            <a:ext cx="11064240" cy="365760"/>
+          </a:xfrm>
+          <a:prstGeom prst="rect">
+            <a:avLst/>
+          </a:prstGeom>
+          <a:noFill/>
+          <a:ln/>
+        </p:spPr>
+        <p:txBody>
+          <a:bodyPr wrap="square" lIns="0" tIns="0" rIns="0" bIns="0" rtlCol="0" anchor="ctr"/>
+          <a:lstStyle/>
+          <a:p>
+            <a:pPr indent="0" marL="0">
+              <a:buNone/>
+            </a:pPr>
+            <a:r>
+              <a:rPr lang="en-US" sz="1600" dirty="0">
+                <a:solidFill>
+                  <a:srgbClr val="5E7681"/>
+                </a:solidFill>
+                <a:latin typeface="Meiryo" pitchFamily="34" charset="0"/>
+                <a:ea typeface="Meiryo" pitchFamily="34" charset="-122"/>
+                <a:cs typeface="Meiryo" pitchFamily="34" charset="-120"/>
+              </a:rPr>
+              <a:t>押すだけで直ります。ご安心ください</a:t>
+            </a:r>
+            <a:endParaRPr lang="en-US" sz="1600" dirty="0"/>
+          </a:p>
+        </p:txBody>
+      </p:sp>
+      <p:sp>
+        <p:nvSpPr>
+          <p:cNvPr id="6" name="Text 3"/>
+          <p:cNvSpPr/>
+          <p:nvPr/>
+        </p:nvSpPr>
+        <p:spPr>
+          <a:xfrm>
+            <a:off x="11338560" y="6309360"/>
+            <a:ext cx="457200" cy="274320"/>
+          </a:xfrm>
+          <a:prstGeom prst="rect">
+            <a:avLst/>
+          </a:prstGeom>
+          <a:noFill/>
+          <a:ln/>
+        </p:spPr>
+        <p:txBody>
+          <a:bodyPr wrap="square" lIns="0" tIns="0" rIns="0" bIns="0" rtlCol="0" anchor="ctr"/>
+          <a:lstStyle/>
+          <a:p>
+            <a:pPr algn="r" indent="0" marL="0">
+              <a:buNone/>
+            </a:pPr>
+            <a:r>
+              <a:rPr lang="en-US" sz="1100" dirty="0">
+                <a:solidFill>
+                  <a:srgbClr val="A8B4B8"/>
+                </a:solidFill>
+                <a:latin typeface="Meiryo" pitchFamily="34" charset="0"/>
+                <a:ea typeface="Meiryo" pitchFamily="34" charset="-122"/>
+                <a:cs typeface="Meiryo" pitchFamily="34" charset="-120"/>
+              </a:rPr>
+              <a:t>6</a:t>
+            </a:r>
+            <a:endParaRPr lang="en-US" sz="1100" dirty="0"/>
+          </a:p>
+        </p:txBody>
+      </p:sp>
+      <p:pic>
+        <p:nvPicPr>
+          <p:cNvPr id="7" name="Image 1" descr="/sessions/compassionate-sweet-heisenberg/mnt/dev-aspath-life-main/_wp移行素材/★引継ぎ資料/画像/Y04_コードエディターの注意.jpg">    </p:cNvPr>
+          <p:cNvPicPr>
+            <a:picLocks noChangeAspect="1"/>
+          </p:cNvPicPr>
+          <p:nvPr/>
+        </p:nvPicPr>
+        <p:blipFill>
+          <a:blip r:embed="rId2"/>
+          <a:stretch>
+            <a:fillRect/>
+          </a:stretch>
+        </p:blipFill>
+        <p:spPr>
+          <a:xfrm>
             <a:off x="640080" y="1737360"/>
             <a:ext cx="6858000" cy="3341526"/>
           </a:xfrm>
@@ -8912,7 +9787,7 @@
       </p:pic>
       <p:sp>
         <p:nvSpPr>
-          <p:cNvPr id="6" name="Text 3"/>
+          <p:cNvPr id="8" name="Text 4"/>
           <p:cNvSpPr/>
           <p:nvPr/>
         </p:nvSpPr>
@@ -8951,7 +9826,7 @@
       </p:sp>
       <p:sp>
         <p:nvSpPr>
-          <p:cNvPr id="7" name="Shape 4"/>
+          <p:cNvPr id="9" name="Shape 5"/>
           <p:cNvSpPr/>
           <p:nvPr/>
         </p:nvSpPr>
@@ -8973,7 +9848,7 @@
       </p:sp>
       <p:sp>
         <p:nvSpPr>
-          <p:cNvPr id="8" name="Text 5"/>
+          <p:cNvPr id="10" name="Text 6"/>
           <p:cNvSpPr/>
           <p:nvPr/>
         </p:nvSpPr>
@@ -9012,7 +9887,7 @@
       </p:sp>
       <p:sp>
         <p:nvSpPr>
-          <p:cNvPr id="9" name="Text 6"/>
+          <p:cNvPr id="11" name="Text 7"/>
           <p:cNvSpPr/>
           <p:nvPr/>
         </p:nvSpPr>
@@ -9051,7 +9926,7 @@
       </p:sp>
       <p:sp>
         <p:nvSpPr>
-          <p:cNvPr id="10" name="Shape 7"/>
+          <p:cNvPr id="12" name="Shape 8"/>
           <p:cNvSpPr/>
           <p:nvPr/>
         </p:nvSpPr>
@@ -9073,7 +9948,7 @@
       </p:sp>
       <p:sp>
         <p:nvSpPr>
-          <p:cNvPr id="11" name="Text 8"/>
+          <p:cNvPr id="13" name="Text 9"/>
           <p:cNvSpPr/>
           <p:nvPr/>
         </p:nvSpPr>
@@ -9234,126 +10109,9 @@
           <a:chExt cx="0" cy="0"/>
         </a:xfrm>
       </p:grpSpPr>
-      <p:sp>
-        <p:nvSpPr>
-          <p:cNvPr id="2" name="Text 0"/>
-          <p:cNvSpPr/>
-          <p:nvPr/>
-        </p:nvSpPr>
-        <p:spPr>
-          <a:xfrm>
-            <a:off x="548640" y="292608"/>
-            <a:ext cx="11064240" cy="731520"/>
-          </a:xfrm>
-          <a:prstGeom prst="rect">
-            <a:avLst/>
-          </a:prstGeom>
-          <a:noFill/>
-          <a:ln/>
-        </p:spPr>
-        <p:txBody>
-          <a:bodyPr wrap="square" lIns="0" tIns="0" rIns="0" bIns="0" rtlCol="0" anchor="ctr"/>
-          <a:lstStyle/>
-          <a:p>
-            <a:pPr indent="0" marL="0">
-              <a:buNone/>
-            </a:pPr>
-            <a:r>
-              <a:rPr lang="en-US" sz="3400" b="1" dirty="0">
-                <a:solidFill>
-                  <a:srgbClr val="264653"/>
-                </a:solidFill>
-                <a:latin typeface="Meiryo" pitchFamily="34" charset="0"/>
-                <a:ea typeface="Meiryo" pitchFamily="34" charset="-122"/>
-                <a:cs typeface="Meiryo" pitchFamily="34" charset="-120"/>
-              </a:rPr>
-              <a:t>コメントに返信する</a:t>
-            </a:r>
-            <a:endParaRPr lang="en-US" sz="3400" dirty="0"/>
-          </a:p>
-        </p:txBody>
-      </p:sp>
-      <p:sp>
-        <p:nvSpPr>
-          <p:cNvPr id="3" name="Text 1"/>
-          <p:cNvSpPr/>
-          <p:nvPr/>
-        </p:nvSpPr>
-        <p:spPr>
-          <a:xfrm>
-            <a:off x="566928" y="1042416"/>
-            <a:ext cx="11064240" cy="365760"/>
-          </a:xfrm>
-          <a:prstGeom prst="rect">
-            <a:avLst/>
-          </a:prstGeom>
-          <a:noFill/>
-          <a:ln/>
-        </p:spPr>
-        <p:txBody>
-          <a:bodyPr wrap="square" lIns="0" tIns="0" rIns="0" bIns="0" rtlCol="0" anchor="ctr"/>
-          <a:lstStyle/>
-          <a:p>
-            <a:pPr indent="0" marL="0">
-              <a:buNone/>
-            </a:pPr>
-            <a:r>
-              <a:rPr lang="en-US" sz="1600" dirty="0">
-                <a:solidFill>
-                  <a:srgbClr val="5E7681"/>
-                </a:solidFill>
-                <a:latin typeface="Meiryo" pitchFamily="34" charset="0"/>
-                <a:ea typeface="Meiryo" pitchFamily="34" charset="-122"/>
-                <a:cs typeface="Meiryo" pitchFamily="34" charset="-120"/>
-              </a:rPr>
-              <a:t>コメント</a:t>
-            </a:r>
-            <a:endParaRPr lang="en-US" sz="1600" dirty="0"/>
-          </a:p>
-        </p:txBody>
-      </p:sp>
-      <p:sp>
-        <p:nvSpPr>
-          <p:cNvPr id="4" name="Text 2"/>
-          <p:cNvSpPr/>
-          <p:nvPr/>
-        </p:nvSpPr>
-        <p:spPr>
-          <a:xfrm>
-            <a:off x="11338560" y="6309360"/>
-            <a:ext cx="457200" cy="274320"/>
-          </a:xfrm>
-          <a:prstGeom prst="rect">
-            <a:avLst/>
-          </a:prstGeom>
-          <a:noFill/>
-          <a:ln/>
-        </p:spPr>
-        <p:txBody>
-          <a:bodyPr wrap="square" lIns="0" tIns="0" rIns="0" bIns="0" rtlCol="0" anchor="ctr"/>
-          <a:lstStyle/>
-          <a:p>
-            <a:pPr algn="r" indent="0" marL="0">
-              <a:buNone/>
-            </a:pPr>
-            <a:r>
-              <a:rPr lang="en-US" sz="1100" dirty="0">
-                <a:solidFill>
-                  <a:srgbClr val="A8B4B8"/>
-                </a:solidFill>
-                <a:latin typeface="Meiryo" pitchFamily="34" charset="0"/>
-                <a:ea typeface="Meiryo" pitchFamily="34" charset="-122"/>
-                <a:cs typeface="Meiryo" pitchFamily="34" charset="-120"/>
-              </a:rPr>
-              <a:t>7</a:t>
-            </a:r>
-            <a:endParaRPr lang="en-US" sz="1100" dirty="0"/>
-          </a:p>
-        </p:txBody>
-      </p:sp>
       <p:pic>
         <p:nvPicPr>
-          <p:cNvPr id="5" name="Image 0" descr="/sessions/compassionate-sweet-heisenberg/mnt/dev-aspath-life-main/_wp移行素材/★引継ぎ資料/画像/Y05_コメント.jpg">    </p:cNvPr>
+          <p:cNvPr id="2" name="Image 0" descr="/sessions/compassionate-sweet-heisenberg/mnt/dev-aspath-life-main/tools/assets/logo-deck.png">    </p:cNvPr>
           <p:cNvPicPr>
             <a:picLocks noChangeAspect="1"/>
           </p:cNvPicPr>
@@ -9367,6 +10125,186 @@
         </p:blipFill>
         <p:spPr>
           <a:xfrm>
+            <a:off x="11458173" y="109728"/>
+            <a:ext cx="209571" cy="256032"/>
+          </a:xfrm>
+          <a:prstGeom prst="rect">
+            <a:avLst/>
+          </a:prstGeom>
+        </p:spPr>
+      </p:pic>
+      <p:sp>
+        <p:nvSpPr>
+          <p:cNvPr id="3" name="Text 0"/>
+          <p:cNvSpPr txBox="1"/>
+          <p:nvPr/>
+        </p:nvSpPr>
+        <p:spPr>
+          <a:xfrm>
+            <a:off x="8623533" y="128016"/>
+            <a:ext cx="2743200" cy="237744"/>
+          </a:xfrm>
+          <a:prstGeom prst="rect">
+            <a:avLst/>
+          </a:prstGeom>
+          <a:noFill/>
+          <a:ln/>
+        </p:spPr>
+        <p:txBody>
+          <a:bodyPr wrap="square" lIns="0" tIns="0" rIns="0" bIns="0" rtlCol="0" anchor="ctr"/>
+          <a:lstStyle/>
+          <a:p>
+            <a:pPr algn="r" indent="0" marL="0">
+              <a:buNone/>
+            </a:pPr>
+            <a:r>
+              <a:rPr lang="en-US" sz="750" dirty="0">
+                <a:solidFill>
+                  <a:srgbClr val="97A9AF"/>
+                </a:solidFill>
+                <a:latin typeface="Meiryo" pitchFamily="34" charset="0"/>
+                <a:ea typeface="Meiryo" pitchFamily="34" charset="-122"/>
+                <a:cs typeface="Meiryo" pitchFamily="34" charset="-120"/>
+              </a:rPr>
+              <a:t>鹿児島のパーキンソン病専門トレーニングスタジオ</a:t>
+            </a:r>
+            <a:endParaRPr lang="en-US" sz="750" dirty="0"/>
+          </a:p>
+        </p:txBody>
+      </p:sp>
+      <p:sp>
+        <p:nvSpPr>
+          <p:cNvPr id="4" name="Text 1"/>
+          <p:cNvSpPr/>
+          <p:nvPr/>
+        </p:nvSpPr>
+        <p:spPr>
+          <a:xfrm>
+            <a:off x="548640" y="292608"/>
+            <a:ext cx="11064240" cy="731520"/>
+          </a:xfrm>
+          <a:prstGeom prst="rect">
+            <a:avLst/>
+          </a:prstGeom>
+          <a:noFill/>
+          <a:ln/>
+        </p:spPr>
+        <p:txBody>
+          <a:bodyPr wrap="square" lIns="0" tIns="0" rIns="0" bIns="0" rtlCol="0" anchor="ctr"/>
+          <a:lstStyle/>
+          <a:p>
+            <a:pPr indent="0" marL="0">
+              <a:buNone/>
+            </a:pPr>
+            <a:r>
+              <a:rPr lang="en-US" sz="3400" b="1" dirty="0">
+                <a:solidFill>
+                  <a:srgbClr val="264653"/>
+                </a:solidFill>
+                <a:latin typeface="Meiryo" pitchFamily="34" charset="0"/>
+                <a:ea typeface="Meiryo" pitchFamily="34" charset="-122"/>
+                <a:cs typeface="Meiryo" pitchFamily="34" charset="-120"/>
+              </a:rPr>
+              <a:t>コメントに返信する</a:t>
+            </a:r>
+            <a:endParaRPr lang="en-US" sz="3400" dirty="0"/>
+          </a:p>
+        </p:txBody>
+      </p:sp>
+      <p:sp>
+        <p:nvSpPr>
+          <p:cNvPr id="5" name="Text 2"/>
+          <p:cNvSpPr/>
+          <p:nvPr/>
+        </p:nvSpPr>
+        <p:spPr>
+          <a:xfrm>
+            <a:off x="566928" y="1042416"/>
+            <a:ext cx="11064240" cy="365760"/>
+          </a:xfrm>
+          <a:prstGeom prst="rect">
+            <a:avLst/>
+          </a:prstGeom>
+          <a:noFill/>
+          <a:ln/>
+        </p:spPr>
+        <p:txBody>
+          <a:bodyPr wrap="square" lIns="0" tIns="0" rIns="0" bIns="0" rtlCol="0" anchor="ctr"/>
+          <a:lstStyle/>
+          <a:p>
+            <a:pPr indent="0" marL="0">
+              <a:buNone/>
+            </a:pPr>
+            <a:r>
+              <a:rPr lang="en-US" sz="1600" dirty="0">
+                <a:solidFill>
+                  <a:srgbClr val="5E7681"/>
+                </a:solidFill>
+                <a:latin typeface="Meiryo" pitchFamily="34" charset="0"/>
+                <a:ea typeface="Meiryo" pitchFamily="34" charset="-122"/>
+                <a:cs typeface="Meiryo" pitchFamily="34" charset="-120"/>
+              </a:rPr>
+              <a:t>コメント</a:t>
+            </a:r>
+            <a:endParaRPr lang="en-US" sz="1600" dirty="0"/>
+          </a:p>
+        </p:txBody>
+      </p:sp>
+      <p:sp>
+        <p:nvSpPr>
+          <p:cNvPr id="6" name="Text 3"/>
+          <p:cNvSpPr/>
+          <p:nvPr/>
+        </p:nvSpPr>
+        <p:spPr>
+          <a:xfrm>
+            <a:off x="11338560" y="6309360"/>
+            <a:ext cx="457200" cy="274320"/>
+          </a:xfrm>
+          <a:prstGeom prst="rect">
+            <a:avLst/>
+          </a:prstGeom>
+          <a:noFill/>
+          <a:ln/>
+        </p:spPr>
+        <p:txBody>
+          <a:bodyPr wrap="square" lIns="0" tIns="0" rIns="0" bIns="0" rtlCol="0" anchor="ctr"/>
+          <a:lstStyle/>
+          <a:p>
+            <a:pPr algn="r" indent="0" marL="0">
+              <a:buNone/>
+            </a:pPr>
+            <a:r>
+              <a:rPr lang="en-US" sz="1100" dirty="0">
+                <a:solidFill>
+                  <a:srgbClr val="A8B4B8"/>
+                </a:solidFill>
+                <a:latin typeface="Meiryo" pitchFamily="34" charset="0"/>
+                <a:ea typeface="Meiryo" pitchFamily="34" charset="-122"/>
+                <a:cs typeface="Meiryo" pitchFamily="34" charset="-120"/>
+              </a:rPr>
+              <a:t>7</a:t>
+            </a:r>
+            <a:endParaRPr lang="en-US" sz="1100" dirty="0"/>
+          </a:p>
+        </p:txBody>
+      </p:sp>
+      <p:pic>
+        <p:nvPicPr>
+          <p:cNvPr id="7" name="Image 1" descr="/sessions/compassionate-sweet-heisenberg/mnt/dev-aspath-life-main/_wp移行素材/★引継ぎ資料/画像/Y05_コメント.jpg">    </p:cNvPr>
+          <p:cNvPicPr>
+            <a:picLocks noChangeAspect="1"/>
+          </p:cNvPicPr>
+          <p:nvPr/>
+        </p:nvPicPr>
+        <p:blipFill>
+          <a:blip r:embed="rId2"/>
+          <a:stretch>
+            <a:fillRect/>
+          </a:stretch>
+        </p:blipFill>
+        <p:spPr>
+          <a:xfrm>
             <a:off x="640080" y="1691640"/>
             <a:ext cx="6858000" cy="3341526"/>
           </a:xfrm>
@@ -9377,7 +10315,7 @@
       </p:pic>
       <p:sp>
         <p:nvSpPr>
-          <p:cNvPr id="6" name="Shape 3"/>
+          <p:cNvPr id="8" name="Shape 4"/>
           <p:cNvSpPr/>
           <p:nvPr/>
         </p:nvSpPr>
@@ -9397,7 +10335,7 @@
       </p:sp>
       <p:sp>
         <p:nvSpPr>
-          <p:cNvPr id="7" name="Text 4"/>
+          <p:cNvPr id="9" name="Text 5"/>
           <p:cNvSpPr/>
           <p:nvPr/>
         </p:nvSpPr>
@@ -9436,7 +10374,7 @@
       </p:sp>
       <p:sp>
         <p:nvSpPr>
-          <p:cNvPr id="8" name="Text 5"/>
+          <p:cNvPr id="10" name="Text 6"/>
           <p:cNvSpPr/>
           <p:nvPr/>
         </p:nvSpPr>
@@ -9475,7 +10413,7 @@
       </p:sp>
       <p:sp>
         <p:nvSpPr>
-          <p:cNvPr id="9" name="Shape 6"/>
+          <p:cNvPr id="11" name="Shape 7"/>
           <p:cNvSpPr/>
           <p:nvPr/>
         </p:nvSpPr>
@@ -9495,7 +10433,7 @@
       </p:sp>
       <p:sp>
         <p:nvSpPr>
-          <p:cNvPr id="10" name="Text 7"/>
+          <p:cNvPr id="12" name="Text 8"/>
           <p:cNvSpPr/>
           <p:nvPr/>
         </p:nvSpPr>
@@ -9534,7 +10472,7 @@
       </p:sp>
       <p:sp>
         <p:nvSpPr>
-          <p:cNvPr id="11" name="Text 8"/>
+          <p:cNvPr id="13" name="Text 9"/>
           <p:cNvSpPr/>
           <p:nvPr/>
         </p:nvSpPr>
@@ -9573,7 +10511,7 @@
       </p:sp>
       <p:sp>
         <p:nvSpPr>
-          <p:cNvPr id="12" name="Shape 9"/>
+          <p:cNvPr id="14" name="Shape 10"/>
           <p:cNvSpPr/>
           <p:nvPr/>
         </p:nvSpPr>
@@ -9593,7 +10531,7 @@
       </p:sp>
       <p:sp>
         <p:nvSpPr>
-          <p:cNvPr id="13" name="Text 10"/>
+          <p:cNvPr id="15" name="Text 11"/>
           <p:cNvSpPr/>
           <p:nvPr/>
         </p:nvSpPr>
@@ -9632,7 +10570,7 @@
       </p:sp>
       <p:sp>
         <p:nvSpPr>
-          <p:cNvPr id="14" name="Text 11"/>
+          <p:cNvPr id="16" name="Text 12"/>
           <p:cNvSpPr/>
           <p:nvPr/>
         </p:nvSpPr>
@@ -9671,7 +10609,7 @@
       </p:sp>
       <p:sp>
         <p:nvSpPr>
-          <p:cNvPr id="15" name="Shape 12"/>
+          <p:cNvPr id="17" name="Shape 13"/>
           <p:cNvSpPr/>
           <p:nvPr/>
         </p:nvSpPr>
@@ -9691,7 +10629,7 @@
       </p:sp>
       <p:sp>
         <p:nvSpPr>
-          <p:cNvPr id="16" name="Text 13"/>
+          <p:cNvPr id="18" name="Text 14"/>
           <p:cNvSpPr/>
           <p:nvPr/>
         </p:nvSpPr>
@@ -9730,7 +10668,7 @@
       </p:sp>
       <p:sp>
         <p:nvSpPr>
-          <p:cNvPr id="17" name="Text 14"/>
+          <p:cNvPr id="19" name="Text 15"/>
           <p:cNvSpPr/>
           <p:nvPr/>
         </p:nvSpPr>
@@ -9769,7 +10707,7 @@
       </p:sp>
       <p:sp>
         <p:nvSpPr>
-          <p:cNvPr id="18" name="Shape 15"/>
+          <p:cNvPr id="20" name="Shape 16"/>
           <p:cNvSpPr/>
           <p:nvPr/>
         </p:nvSpPr>
@@ -9791,7 +10729,7 @@
       </p:sp>
       <p:sp>
         <p:nvSpPr>
-          <p:cNvPr id="19" name="Text 16"/>
+          <p:cNvPr id="21" name="Text 17"/>
           <p:cNvSpPr/>
           <p:nvPr/>
         </p:nvSpPr>
@@ -9853,7 +10791,7 @@
       </p:sp>
       <p:sp>
         <p:nvSpPr>
-          <p:cNvPr id="20" name="Shape 17"/>
+          <p:cNvPr id="22" name="Shape 18"/>
           <p:cNvSpPr/>
           <p:nvPr/>
         </p:nvSpPr>
@@ -9875,7 +10813,7 @@
       </p:sp>
       <p:sp>
         <p:nvSpPr>
-          <p:cNvPr id="21" name="Text 18"/>
+          <p:cNvPr id="23" name="Text 19"/>
           <p:cNvSpPr/>
           <p:nvPr/>
         </p:nvSpPr>
@@ -9967,126 +10905,9 @@
           <a:chExt cx="0" cy="0"/>
         </a:xfrm>
       </p:grpSpPr>
-      <p:sp>
-        <p:nvSpPr>
-          <p:cNvPr id="2" name="Text 0"/>
-          <p:cNvSpPr/>
-          <p:nvPr/>
-        </p:nvSpPr>
-        <p:spPr>
-          <a:xfrm>
-            <a:off x="548640" y="292608"/>
-            <a:ext cx="11064240" cy="731520"/>
-          </a:xfrm>
-          <a:prstGeom prst="rect">
-            <a:avLst/>
-          </a:prstGeom>
-          <a:noFill/>
-          <a:ln/>
-        </p:spPr>
-        <p:txBody>
-          <a:bodyPr wrap="square" lIns="0" tIns="0" rIns="0" bIns="0" rtlCol="0" anchor="ctr"/>
-          <a:lstStyle/>
-          <a:p>
-            <a:pPr indent="0" marL="0">
-              <a:buNone/>
-            </a:pPr>
-            <a:r>
-              <a:rPr lang="en-US" sz="3400" b="1" dirty="0">
-                <a:solidFill>
-                  <a:srgbClr val="264653"/>
-                </a:solidFill>
-                <a:latin typeface="Meiryo" pitchFamily="34" charset="0"/>
-                <a:ea typeface="Meiryo" pitchFamily="34" charset="-122"/>
-                <a:cs typeface="Meiryo" pitchFamily="34" charset="-120"/>
-              </a:rPr>
-              <a:t>初回体験の申込を見る</a:t>
-            </a:r>
-            <a:endParaRPr lang="en-US" sz="3400" dirty="0"/>
-          </a:p>
-        </p:txBody>
-      </p:sp>
-      <p:sp>
-        <p:nvSpPr>
-          <p:cNvPr id="3" name="Text 1"/>
-          <p:cNvSpPr/>
-          <p:nvPr/>
-        </p:nvSpPr>
-        <p:spPr>
-          <a:xfrm>
-            <a:off x="566928" y="1042416"/>
-            <a:ext cx="11064240" cy="365760"/>
-          </a:xfrm>
-          <a:prstGeom prst="rect">
-            <a:avLst/>
-          </a:prstGeom>
-          <a:noFill/>
-          <a:ln/>
-        </p:spPr>
-        <p:txBody>
-          <a:bodyPr wrap="square" lIns="0" tIns="0" rIns="0" bIns="0" rtlCol="0" anchor="ctr"/>
-          <a:lstStyle/>
-          <a:p>
-            <a:pPr indent="0" marL="0">
-              <a:buNone/>
-            </a:pPr>
-            <a:r>
-              <a:rPr lang="en-US" sz="1600" dirty="0">
-                <a:solidFill>
-                  <a:srgbClr val="5E7681"/>
-                </a:solidFill>
-                <a:latin typeface="Meiryo" pitchFamily="34" charset="0"/>
-                <a:ea typeface="Meiryo" pitchFamily="34" charset="-122"/>
-                <a:cs typeface="Meiryo" pitchFamily="34" charset="-120"/>
-              </a:rPr>
-              <a:t>初回体験の申込</a:t>
-            </a:r>
-            <a:endParaRPr lang="en-US" sz="1600" dirty="0"/>
-          </a:p>
-        </p:txBody>
-      </p:sp>
-      <p:sp>
-        <p:nvSpPr>
-          <p:cNvPr id="4" name="Text 2"/>
-          <p:cNvSpPr/>
-          <p:nvPr/>
-        </p:nvSpPr>
-        <p:spPr>
-          <a:xfrm>
-            <a:off x="11338560" y="6309360"/>
-            <a:ext cx="457200" cy="274320"/>
-          </a:xfrm>
-          <a:prstGeom prst="rect">
-            <a:avLst/>
-          </a:prstGeom>
-          <a:noFill/>
-          <a:ln/>
-        </p:spPr>
-        <p:txBody>
-          <a:bodyPr wrap="square" lIns="0" tIns="0" rIns="0" bIns="0" rtlCol="0" anchor="ctr"/>
-          <a:lstStyle/>
-          <a:p>
-            <a:pPr algn="r" indent="0" marL="0">
-              <a:buNone/>
-            </a:pPr>
-            <a:r>
-              <a:rPr lang="en-US" sz="1100" dirty="0">
-                <a:solidFill>
-                  <a:srgbClr val="A8B4B8"/>
-                </a:solidFill>
-                <a:latin typeface="Meiryo" pitchFamily="34" charset="0"/>
-                <a:ea typeface="Meiryo" pitchFamily="34" charset="-122"/>
-                <a:cs typeface="Meiryo" pitchFamily="34" charset="-120"/>
-              </a:rPr>
-              <a:t>8</a:t>
-            </a:r>
-            <a:endParaRPr lang="en-US" sz="1100" dirty="0"/>
-          </a:p>
-        </p:txBody>
-      </p:sp>
       <p:pic>
         <p:nvPicPr>
-          <p:cNvPr id="5" name="Image 0" descr="/sessions/compassionate-sweet-heisenberg/mnt/dev-aspath-life-main/_wp移行素材/★引継ぎ資料/画像/Y06_申込.jpg">    </p:cNvPr>
+          <p:cNvPr id="2" name="Image 0" descr="/sessions/compassionate-sweet-heisenberg/mnt/dev-aspath-life-main/tools/assets/logo-deck.png">    </p:cNvPr>
           <p:cNvPicPr>
             <a:picLocks noChangeAspect="1"/>
           </p:cNvPicPr>
@@ -10100,6 +10921,186 @@
         </p:blipFill>
         <p:spPr>
           <a:xfrm>
+            <a:off x="11458173" y="109728"/>
+            <a:ext cx="209571" cy="256032"/>
+          </a:xfrm>
+          <a:prstGeom prst="rect">
+            <a:avLst/>
+          </a:prstGeom>
+        </p:spPr>
+      </p:pic>
+      <p:sp>
+        <p:nvSpPr>
+          <p:cNvPr id="3" name="Text 0"/>
+          <p:cNvSpPr txBox="1"/>
+          <p:nvPr/>
+        </p:nvSpPr>
+        <p:spPr>
+          <a:xfrm>
+            <a:off x="8623533" y="128016"/>
+            <a:ext cx="2743200" cy="237744"/>
+          </a:xfrm>
+          <a:prstGeom prst="rect">
+            <a:avLst/>
+          </a:prstGeom>
+          <a:noFill/>
+          <a:ln/>
+        </p:spPr>
+        <p:txBody>
+          <a:bodyPr wrap="square" lIns="0" tIns="0" rIns="0" bIns="0" rtlCol="0" anchor="ctr"/>
+          <a:lstStyle/>
+          <a:p>
+            <a:pPr algn="r" indent="0" marL="0">
+              <a:buNone/>
+            </a:pPr>
+            <a:r>
+              <a:rPr lang="en-US" sz="750" dirty="0">
+                <a:solidFill>
+                  <a:srgbClr val="97A9AF"/>
+                </a:solidFill>
+                <a:latin typeface="Meiryo" pitchFamily="34" charset="0"/>
+                <a:ea typeface="Meiryo" pitchFamily="34" charset="-122"/>
+                <a:cs typeface="Meiryo" pitchFamily="34" charset="-120"/>
+              </a:rPr>
+              <a:t>鹿児島のパーキンソン病専門トレーニングスタジオ</a:t>
+            </a:r>
+            <a:endParaRPr lang="en-US" sz="750" dirty="0"/>
+          </a:p>
+        </p:txBody>
+      </p:sp>
+      <p:sp>
+        <p:nvSpPr>
+          <p:cNvPr id="4" name="Text 1"/>
+          <p:cNvSpPr/>
+          <p:nvPr/>
+        </p:nvSpPr>
+        <p:spPr>
+          <a:xfrm>
+            <a:off x="548640" y="292608"/>
+            <a:ext cx="11064240" cy="731520"/>
+          </a:xfrm>
+          <a:prstGeom prst="rect">
+            <a:avLst/>
+          </a:prstGeom>
+          <a:noFill/>
+          <a:ln/>
+        </p:spPr>
+        <p:txBody>
+          <a:bodyPr wrap="square" lIns="0" tIns="0" rIns="0" bIns="0" rtlCol="0" anchor="ctr"/>
+          <a:lstStyle/>
+          <a:p>
+            <a:pPr indent="0" marL="0">
+              <a:buNone/>
+            </a:pPr>
+            <a:r>
+              <a:rPr lang="en-US" sz="3400" b="1" dirty="0">
+                <a:solidFill>
+                  <a:srgbClr val="264653"/>
+                </a:solidFill>
+                <a:latin typeface="Meiryo" pitchFamily="34" charset="0"/>
+                <a:ea typeface="Meiryo" pitchFamily="34" charset="-122"/>
+                <a:cs typeface="Meiryo" pitchFamily="34" charset="-120"/>
+              </a:rPr>
+              <a:t>初回体験の申込を見る</a:t>
+            </a:r>
+            <a:endParaRPr lang="en-US" sz="3400" dirty="0"/>
+          </a:p>
+        </p:txBody>
+      </p:sp>
+      <p:sp>
+        <p:nvSpPr>
+          <p:cNvPr id="5" name="Text 2"/>
+          <p:cNvSpPr/>
+          <p:nvPr/>
+        </p:nvSpPr>
+        <p:spPr>
+          <a:xfrm>
+            <a:off x="566928" y="1042416"/>
+            <a:ext cx="11064240" cy="365760"/>
+          </a:xfrm>
+          <a:prstGeom prst="rect">
+            <a:avLst/>
+          </a:prstGeom>
+          <a:noFill/>
+          <a:ln/>
+        </p:spPr>
+        <p:txBody>
+          <a:bodyPr wrap="square" lIns="0" tIns="0" rIns="0" bIns="0" rtlCol="0" anchor="ctr"/>
+          <a:lstStyle/>
+          <a:p>
+            <a:pPr indent="0" marL="0">
+              <a:buNone/>
+            </a:pPr>
+            <a:r>
+              <a:rPr lang="en-US" sz="1600" dirty="0">
+                <a:solidFill>
+                  <a:srgbClr val="5E7681"/>
+                </a:solidFill>
+                <a:latin typeface="Meiryo" pitchFamily="34" charset="0"/>
+                <a:ea typeface="Meiryo" pitchFamily="34" charset="-122"/>
+                <a:cs typeface="Meiryo" pitchFamily="34" charset="-120"/>
+              </a:rPr>
+              <a:t>初回体験の申込</a:t>
+            </a:r>
+            <a:endParaRPr lang="en-US" sz="1600" dirty="0"/>
+          </a:p>
+        </p:txBody>
+      </p:sp>
+      <p:sp>
+        <p:nvSpPr>
+          <p:cNvPr id="6" name="Text 3"/>
+          <p:cNvSpPr/>
+          <p:nvPr/>
+        </p:nvSpPr>
+        <p:spPr>
+          <a:xfrm>
+            <a:off x="11338560" y="6309360"/>
+            <a:ext cx="457200" cy="274320"/>
+          </a:xfrm>
+          <a:prstGeom prst="rect">
+            <a:avLst/>
+          </a:prstGeom>
+          <a:noFill/>
+          <a:ln/>
+        </p:spPr>
+        <p:txBody>
+          <a:bodyPr wrap="square" lIns="0" tIns="0" rIns="0" bIns="0" rtlCol="0" anchor="ctr"/>
+          <a:lstStyle/>
+          <a:p>
+            <a:pPr algn="r" indent="0" marL="0">
+              <a:buNone/>
+            </a:pPr>
+            <a:r>
+              <a:rPr lang="en-US" sz="1100" dirty="0">
+                <a:solidFill>
+                  <a:srgbClr val="A8B4B8"/>
+                </a:solidFill>
+                <a:latin typeface="Meiryo" pitchFamily="34" charset="0"/>
+                <a:ea typeface="Meiryo" pitchFamily="34" charset="-122"/>
+                <a:cs typeface="Meiryo" pitchFamily="34" charset="-120"/>
+              </a:rPr>
+              <a:t>8</a:t>
+            </a:r>
+            <a:endParaRPr lang="en-US" sz="1100" dirty="0"/>
+          </a:p>
+        </p:txBody>
+      </p:sp>
+      <p:pic>
+        <p:nvPicPr>
+          <p:cNvPr id="7" name="Image 1" descr="/sessions/compassionate-sweet-heisenberg/mnt/dev-aspath-life-main/_wp移行素材/★引継ぎ資料/画像/Y06_申込.jpg">    </p:cNvPr>
+          <p:cNvPicPr>
+            <a:picLocks noChangeAspect="1"/>
+          </p:cNvPicPr>
+          <p:nvPr/>
+        </p:nvPicPr>
+        <p:blipFill>
+          <a:blip r:embed="rId2"/>
+          <a:stretch>
+            <a:fillRect/>
+          </a:stretch>
+        </p:blipFill>
+        <p:spPr>
+          <a:xfrm>
             <a:off x="640080" y="1691640"/>
             <a:ext cx="6858000" cy="3341526"/>
           </a:xfrm>
@@ -10110,7 +11111,7 @@
       </p:pic>
       <p:sp>
         <p:nvSpPr>
-          <p:cNvPr id="6" name="Text 3"/>
+          <p:cNvPr id="8" name="Text 4"/>
           <p:cNvSpPr/>
           <p:nvPr/>
         </p:nvSpPr>
@@ -10149,7 +11150,7 @@
       </p:sp>
       <p:sp>
         <p:nvSpPr>
-          <p:cNvPr id="7" name="Shape 4"/>
+          <p:cNvPr id="9" name="Shape 5"/>
           <p:cNvSpPr/>
           <p:nvPr/>
         </p:nvSpPr>
@@ -10171,7 +11172,7 @@
       </p:sp>
       <p:sp>
         <p:nvSpPr>
-          <p:cNvPr id="8" name="Text 5"/>
+          <p:cNvPr id="10" name="Text 6"/>
           <p:cNvSpPr/>
           <p:nvPr/>
         </p:nvSpPr>
@@ -10233,7 +11234,7 @@
       </p:sp>
       <p:sp>
         <p:nvSpPr>
-          <p:cNvPr id="9" name="Shape 6"/>
+          <p:cNvPr id="11" name="Shape 7"/>
           <p:cNvSpPr/>
           <p:nvPr/>
         </p:nvSpPr>
@@ -10255,7 +11256,7 @@
       </p:sp>
       <p:sp>
         <p:nvSpPr>
-          <p:cNvPr id="10" name="Text 7"/>
+          <p:cNvPr id="12" name="Text 8"/>
           <p:cNvSpPr/>
           <p:nvPr/>
         </p:nvSpPr>
@@ -10297,7 +11298,7 @@
       </p:sp>
       <p:sp>
         <p:nvSpPr>
-          <p:cNvPr id="11" name="Shape 8"/>
+          <p:cNvPr id="13" name="Shape 9"/>
           <p:cNvSpPr/>
           <p:nvPr/>
         </p:nvSpPr>
@@ -10319,7 +11320,7 @@
       </p:sp>
       <p:sp>
         <p:nvSpPr>
-          <p:cNvPr id="12" name="Text 9"/>
+          <p:cNvPr id="14" name="Text 10"/>
           <p:cNvSpPr/>
           <p:nvPr/>
         </p:nvSpPr>
@@ -10381,7 +11382,7 @@
       </p:sp>
       <p:sp>
         <p:nvSpPr>
-          <p:cNvPr id="13" name="Text 10"/>
+          <p:cNvPr id="15" name="Text 11"/>
           <p:cNvSpPr/>
           <p:nvPr/>
         </p:nvSpPr>
